--- a/workspace/clients/brisken/deliverables/lead-generation/rome-2026/call-collateral/brisken-treasurycentral-zalando.pptx
+++ b/workspace/clients/brisken/deliverables/lead-generation/rome-2026/call-collateral/brisken-treasurycentral-zalando.pptx
@@ -2,25 +2,25 @@
 <file path=ppt/presentation.xml><?xml version="1.0" encoding="utf-8"?>
 <p:presentation xmlns:a="http://schemas.openxmlformats.org/drawingml/2006/main" xmlns:r="http://schemas.openxmlformats.org/officeDocument/2006/relationships" xmlns:p="http://schemas.openxmlformats.org/presentationml/2006/main" saveSubsetFonts="1" autoCompressPictures="0">
   <p:sldMasterIdLst>
-    <p:sldMasterId id="2147483648" r:id="rId1"/>
+    <p:sldMasterId id="2147483648" r:id="rId4"/>
   </p:sldMasterIdLst>
+  <p:notesMasterIdLst>
+    <p:notesMasterId r:id="rId15"/>
+  </p:notesMasterIdLst>
   <p:sldIdLst>
-    <p:sldId id="256" r:id="rId2"/>
-    <p:sldId id="257" r:id="rId3"/>
-    <p:sldId id="258" r:id="rId4"/>
-    <p:sldId id="259" r:id="rId5"/>
-    <p:sldId id="260" r:id="rId6"/>
-    <p:sldId id="261" r:id="rId7"/>
-    <p:sldId id="262" r:id="rId8"/>
-    <p:sldId id="263" r:id="rId9"/>
-    <p:sldId id="264" r:id="rId10"/>
-    <p:sldId id="265" r:id="rId11"/>
+    <p:sldId id="256" r:id="rId5"/>
+    <p:sldId id="257" r:id="rId6"/>
+    <p:sldId id="258" r:id="rId7"/>
+    <p:sldId id="259" r:id="rId8"/>
+    <p:sldId id="260" r:id="rId9"/>
+    <p:sldId id="261" r:id="rId10"/>
+    <p:sldId id="262" r:id="rId11"/>
+    <p:sldId id="263" r:id="rId12"/>
+    <p:sldId id="264" r:id="rId13"/>
+    <p:sldId id="265" r:id="rId14"/>
   </p:sldIdLst>
-  <p:notesMasterIdLst>
-    <p:notesMasterId r:id="rId12"/>
-  </p:notesMasterIdLst>
-  <p:sldSz cx="12191695" cy="6858000"/>
-  <p:notesSz cx="6858000" cy="12191695"/>
+  <p:sldSz cx="12192000" cy="6858000"/>
+  <p:notesSz cx="6858000" cy="12192000"/>
   <p:defaultTextStyle>
     <a:lvl1pPr marL="0" algn="l" defTabSz="914400" rtl="0" eaLnBrk="1" latinLnBrk="0" hangingPunct="1">
       <a:defRPr sz="1800" kern="1200">
@@ -113,7 +113,57 @@
       </a:defRPr>
     </a:lvl9pPr>
   </p:defaultTextStyle>
+  <p:extLst>
+    <p:ext uri="{EFAFB233-063F-42B5-8137-9DF3F51BA10A}">
+      <p15:sldGuideLst xmlns:p15="http://schemas.microsoft.com/office/powerpoint/2012/main"/>
+    </p:ext>
+  </p:extLst>
 </p:presentation>
+</file>
+
+<file path=ppt/changesInfos/changesInfo1.xml><?xml version="1.0" encoding="utf-8"?>
+<pc:chgInfo xmlns:a="http://schemas.openxmlformats.org/drawingml/2006/main" xmlns:r="http://schemas.openxmlformats.org/officeDocument/2006/relationships" xmlns:ac="http://schemas.microsoft.com/office/drawing/2013/main/command" xmlns:pc="http://schemas.microsoft.com/office/powerpoint/2013/main/command">
+  <pc:docChgLst>
+    <pc:chgData name="Dirk Neumann" userId="3f083bcb-a186-44d0-81a0-918c73b145d9" providerId="ADAL" clId="{C1336F6D-DB6E-5C4A-B60A-95CF733899A6}"/>
+    <pc:docChg chg="custSel modSld">
+      <pc:chgData name="Dirk Neumann" userId="3f083bcb-a186-44d0-81a0-918c73b145d9" providerId="ADAL" clId="{C1336F6D-DB6E-5C4A-B60A-95CF733899A6}" dt="2026-07-10T12:16:45.626" v="45" actId="20577"/>
+      <pc:docMkLst>
+        <pc:docMk/>
+      </pc:docMkLst>
+      <pc:sldChg chg="delSp modSp mod">
+        <pc:chgData name="Dirk Neumann" userId="3f083bcb-a186-44d0-81a0-918c73b145d9" providerId="ADAL" clId="{C1336F6D-DB6E-5C4A-B60A-95CF733899A6}" dt="2026-07-10T12:16:45.626" v="45" actId="20577"/>
+        <pc:sldMkLst>
+          <pc:docMk/>
+          <pc:sldMk cId="0" sldId="263"/>
+        </pc:sldMkLst>
+        <pc:spChg chg="mod">
+          <ac:chgData name="Dirk Neumann" userId="3f083bcb-a186-44d0-81a0-918c73b145d9" providerId="ADAL" clId="{C1336F6D-DB6E-5C4A-B60A-95CF733899A6}" dt="2026-07-10T12:16:45.626" v="45" actId="20577"/>
+          <ac:spMkLst>
+            <pc:docMk/>
+            <pc:sldMk cId="0" sldId="263"/>
+            <ac:spMk id="6" creationId="{00000000-0000-0000-0000-000000000000}"/>
+          </ac:spMkLst>
+        </pc:spChg>
+        <pc:spChg chg="mod">
+          <ac:chgData name="Dirk Neumann" userId="3f083bcb-a186-44d0-81a0-918c73b145d9" providerId="ADAL" clId="{C1336F6D-DB6E-5C4A-B60A-95CF733899A6}" dt="2026-07-10T12:16:04.052" v="30" actId="3064"/>
+          <ac:spMkLst>
+            <pc:docMk/>
+            <pc:sldMk cId="0" sldId="263"/>
+            <ac:spMk id="12" creationId="{00000000-0000-0000-0000-000000000000}"/>
+          </ac:spMkLst>
+        </pc:spChg>
+        <pc:picChg chg="del">
+          <ac:chgData name="Dirk Neumann" userId="3f083bcb-a186-44d0-81a0-918c73b145d9" providerId="ADAL" clId="{C1336F6D-DB6E-5C4A-B60A-95CF733899A6}" dt="2026-07-10T12:14:38.658" v="0" actId="478"/>
+          <ac:picMkLst>
+            <pc:docMk/>
+            <pc:sldMk cId="0" sldId="263"/>
+            <ac:picMk id="13" creationId="{00000000-0000-0000-0000-000000000000}"/>
+          </ac:picMkLst>
+        </pc:picChg>
+      </pc:sldChg>
+    </pc:docChg>
+  </pc:docChgLst>
+</pc:chgInfo>
 </file>
 
 <file path=ppt/notesMasters/notesMaster1.xml><?xml version="1.0" encoding="utf-8"?>
@@ -138,234 +188,10 @@
           <a:chExt cx="0" cy="0"/>
         </a:xfrm>
       </p:grpSpPr>
-      <p:sp>
-        <p:nvSpPr>
-          <p:cNvPr id="2" name="Header Placeholder 1"/>
-          <p:cNvSpPr>
-            <a:spLocks noGrp="1"/>
-          </p:cNvSpPr>
-          <p:nvPr>
-            <p:ph type="hdr" sz="quarter"/>
-          </p:nvPr>
-        </p:nvSpPr>
-        <p:spPr>
-          <a:xfrm>
-            <a:off x="0" y="0"/>
-            <a:ext cx="2971800" cy="458788"/>
-          </a:xfrm>
-          <a:prstGeom prst="rect">
-            <a:avLst/>
-          </a:prstGeom>
-        </p:spPr>
-        <p:txBody>
-          <a:bodyPr vert="horz" lIns="91440" tIns="45720" rIns="91440" bIns="45720" rtlCol="0"/>
-          <a:lstStyle>
-            <a:lvl1pPr algn="l">
-              <a:defRPr sz="1200"/>
-            </a:lvl1pPr>
-          </a:lstStyle>
-          <a:p>
-            <a:endParaRPr lang="en-US"/>
-          </a:p>
-        </p:txBody>
-      </p:sp>
-      <p:sp>
-        <p:nvSpPr>
-          <p:cNvPr id="3" name="Date Placeholder 2"/>
-          <p:cNvSpPr>
-            <a:spLocks noGrp="1"/>
-          </p:cNvSpPr>
-          <p:nvPr>
-            <p:ph type="dt" idx="1"/>
-          </p:nvPr>
-        </p:nvSpPr>
-        <p:spPr>
-          <a:xfrm>
-            <a:off x="3884613" y="0"/>
-            <a:ext cx="2971800" cy="458788"/>
-          </a:xfrm>
-          <a:prstGeom prst="rect">
-            <a:avLst/>
-          </a:prstGeom>
-        </p:spPr>
-        <p:txBody>
-          <a:bodyPr vert="horz" lIns="91440" tIns="45720" rIns="91440" bIns="45720" rtlCol="0"/>
-          <a:lstStyle>
-            <a:lvl1pPr algn="r">
-              <a:defRPr sz="1200"/>
-            </a:lvl1pPr>
-          </a:lstStyle>
-          <a:p>
-            <a:fld id="{5282F153-3F37-0F45-9E97-73ACFA13230C}" type="datetimeFigureOut">
-              <a:rPr lang="en-US"/>
-              <a:t>7/23/19</a:t>
-            </a:fld>
-            <a:endParaRPr lang="en-US"/>
-          </a:p>
-        </p:txBody>
-      </p:sp>
-      <p:sp>
-        <p:nvSpPr>
-          <p:cNvPr id="4" name="Slide Image Placeholder 3"/>
-          <p:cNvSpPr>
-            <a:spLocks noGrp="1" noRot="1" noChangeAspect="1"/>
-          </p:cNvSpPr>
-          <p:nvPr>
-            <p:ph type="sldImg" idx="2"/>
-          </p:nvPr>
-        </p:nvSpPr>
-        <p:spPr>
-          <a:xfrm>
-            <a:off x="685800" y="1143000"/>
-            <a:ext cx="5486400" cy="3086100"/>
-          </a:xfrm>
-          <a:prstGeom prst="rect">
-            <a:avLst/>
-          </a:prstGeom>
-          <a:noFill/>
-          <a:ln w="12700">
-            <a:solidFill>
-              <a:prstClr val="black"/>
-            </a:solidFill>
-          </a:ln>
-        </p:spPr>
-        <p:txBody>
-          <a:bodyPr vert="horz" lIns="91440" tIns="45720" rIns="91440" bIns="45720" rtlCol="0" anchor="ctr"/>
-          <a:lstStyle/>
-          <a:p>
-            <a:endParaRPr lang="en-US"/>
-          </a:p>
-        </p:txBody>
-      </p:sp>
-      <p:sp>
-        <p:nvSpPr>
-          <p:cNvPr id="5" name="Notes Placeholder 4"/>
-          <p:cNvSpPr>
-            <a:spLocks noGrp="1"/>
-          </p:cNvSpPr>
-          <p:nvPr>
-            <p:ph type="body" sz="quarter" idx="3"/>
-          </p:nvPr>
-        </p:nvSpPr>
-        <p:spPr>
-          <a:xfrm>
-            <a:off x="685800" y="4400550"/>
-            <a:ext cx="5486400" cy="3600450"/>
-          </a:xfrm>
-          <a:prstGeom prst="rect">
-            <a:avLst/>
-          </a:prstGeom>
-        </p:spPr>
-        <p:txBody>
-          <a:bodyPr vert="horz" lIns="91440" tIns="45720" rIns="91440" bIns="45720" rtlCol="0"/>
-          <a:lstStyle/>
-          <a:p>
-            <a:pPr lvl="0"/>
-            <a:r>
-              <a:rPr lang="en-US"/>
-              <a:t>Click to edit Master text styles</a:t>
-            </a:r>
-          </a:p>
-          <a:p>
-            <a:pPr lvl="1"/>
-            <a:r>
-              <a:rPr lang="en-US"/>
-              <a:t>Second level</a:t>
-            </a:r>
-          </a:p>
-          <a:p>
-            <a:pPr lvl="2"/>
-            <a:r>
-              <a:rPr lang="en-US"/>
-              <a:t>Third level</a:t>
-            </a:r>
-          </a:p>
-          <a:p>
-            <a:pPr lvl="3"/>
-            <a:r>
-              <a:rPr lang="en-US"/>
-              <a:t>Fourth level</a:t>
-            </a:r>
-          </a:p>
-          <a:p>
-            <a:pPr lvl="4"/>
-            <a:r>
-              <a:rPr lang="en-US"/>
-              <a:t>Fifth level</a:t>
-            </a:r>
-          </a:p>
-        </p:txBody>
-      </p:sp>
-      <p:sp>
-        <p:nvSpPr>
-          <p:cNvPr id="6" name="Footer Placeholder 5"/>
-          <p:cNvSpPr>
-            <a:spLocks noGrp="1"/>
-          </p:cNvSpPr>
-          <p:nvPr>
-            <p:ph type="ftr" sz="quarter" idx="4"/>
-          </p:nvPr>
-        </p:nvSpPr>
-        <p:spPr>
-          <a:xfrm>
-            <a:off x="0" y="8685213"/>
-            <a:ext cx="2971800" cy="458787"/>
-          </a:xfrm>
-          <a:prstGeom prst="rect">
-            <a:avLst/>
-          </a:prstGeom>
-        </p:spPr>
-        <p:txBody>
-          <a:bodyPr vert="horz" lIns="91440" tIns="45720" rIns="91440" bIns="45720" rtlCol="0" anchor="b"/>
-          <a:lstStyle>
-            <a:lvl1pPr algn="l">
-              <a:defRPr sz="1200"/>
-            </a:lvl1pPr>
-          </a:lstStyle>
-          <a:p>
-            <a:endParaRPr lang="en-US"/>
-          </a:p>
-        </p:txBody>
-      </p:sp>
-      <p:sp>
-        <p:nvSpPr>
-          <p:cNvPr id="7" name="Slide Number Placeholder 6"/>
-          <p:cNvSpPr>
-            <a:spLocks noGrp="1"/>
-          </p:cNvSpPr>
-          <p:nvPr>
-            <p:ph type="sldNum" sz="quarter" idx="5"/>
-          </p:nvPr>
-        </p:nvSpPr>
-        <p:spPr>
-          <a:xfrm>
-            <a:off x="3884613" y="8685213"/>
-            <a:ext cx="2971800" cy="458787"/>
-          </a:xfrm>
-          <a:prstGeom prst="rect">
-            <a:avLst/>
-          </a:prstGeom>
-        </p:spPr>
-        <p:txBody>
-          <a:bodyPr vert="horz" lIns="91440" tIns="45720" rIns="91440" bIns="45720" rtlCol="0" anchor="b"/>
-          <a:lstStyle>
-            <a:lvl1pPr algn="r">
-              <a:defRPr sz="1200"/>
-            </a:lvl1pPr>
-          </a:lstStyle>
-          <a:p>
-            <a:fld id="{CE5E9CC1-C706-0F49-92D6-E571CC5EEA8F}" type="slidenum">
-              <a:rPr lang="en-US"/>
-              <a:t>‹#›</a:t>
-            </a:fld>
-            <a:endParaRPr lang="en-US"/>
-          </a:p>
-        </p:txBody>
-      </p:sp>
     </p:spTree>
     <p:extLst>
       <p:ext uri="{BB962C8B-B14F-4D97-AF65-F5344CB8AC3E}">
-        <p14:creationId xmlns:p14="http://schemas.microsoft.com/office/powerpoint/2010/main" val="1024086991"/>
+        <p14:creationId xmlns:p14="http://schemas.microsoft.com/office/powerpoint/2010/main" val="2567703904"/>
       </p:ext>
     </p:extLst>
   </p:cSld>
@@ -509,10 +335,6 @@
           <a:bodyPr/>
           <a:lstStyle/>
           <a:p>
-            <a:r>
-              <a:rPr lang="en-US" dirty="0"/>
-              <a:t/>
-            </a:r>
             <a:endParaRPr lang="en-US" dirty="0"/>
           </a:p>
         </p:txBody>
@@ -597,10 +419,6 @@
           <a:bodyPr/>
           <a:lstStyle/>
           <a:p>
-            <a:r>
-              <a:rPr lang="en-US" dirty="0"/>
-              <a:t/>
-            </a:r>
             <a:endParaRPr lang="en-US" dirty="0"/>
           </a:p>
         </p:txBody>
@@ -685,10 +503,6 @@
           <a:bodyPr/>
           <a:lstStyle/>
           <a:p>
-            <a:r>
-              <a:rPr lang="en-US" dirty="0"/>
-              <a:t/>
-            </a:r>
             <a:endParaRPr lang="en-US" dirty="0"/>
           </a:p>
         </p:txBody>
@@ -773,10 +587,6 @@
           <a:bodyPr/>
           <a:lstStyle/>
           <a:p>
-            <a:r>
-              <a:rPr lang="en-US" dirty="0"/>
-              <a:t/>
-            </a:r>
             <a:endParaRPr lang="en-US" dirty="0"/>
           </a:p>
         </p:txBody>
@@ -861,10 +671,6 @@
           <a:bodyPr/>
           <a:lstStyle/>
           <a:p>
-            <a:r>
-              <a:rPr lang="en-US" dirty="0"/>
-              <a:t/>
-            </a:r>
             <a:endParaRPr lang="en-US" dirty="0"/>
           </a:p>
         </p:txBody>
@@ -949,10 +755,6 @@
           <a:bodyPr/>
           <a:lstStyle/>
           <a:p>
-            <a:r>
-              <a:rPr lang="en-US" dirty="0"/>
-              <a:t/>
-            </a:r>
             <a:endParaRPr lang="en-US" dirty="0"/>
           </a:p>
         </p:txBody>
@@ -1037,10 +839,6 @@
           <a:bodyPr/>
           <a:lstStyle/>
           <a:p>
-            <a:r>
-              <a:rPr lang="en-US" dirty="0"/>
-              <a:t/>
-            </a:r>
             <a:endParaRPr lang="en-US" dirty="0"/>
           </a:p>
         </p:txBody>
@@ -1125,10 +923,6 @@
           <a:bodyPr/>
           <a:lstStyle/>
           <a:p>
-            <a:r>
-              <a:rPr lang="en-US" dirty="0"/>
-              <a:t/>
-            </a:r>
             <a:endParaRPr lang="en-US" dirty="0"/>
           </a:p>
         </p:txBody>
@@ -1213,10 +1007,6 @@
           <a:bodyPr/>
           <a:lstStyle/>
           <a:p>
-            <a:r>
-              <a:rPr lang="en-US" dirty="0"/>
-              <a:t/>
-            </a:r>
             <a:endParaRPr lang="en-US" dirty="0"/>
           </a:p>
         </p:txBody>
@@ -1301,10 +1091,6 @@
           <a:bodyPr/>
           <a:lstStyle/>
           <a:p>
-            <a:r>
-              <a:rPr lang="en-US" dirty="0"/>
-              <a:t/>
-            </a:r>
             <a:endParaRPr lang="en-US" dirty="0"/>
           </a:p>
         </p:txBody>
@@ -1378,6 +1164,11 @@
 <file path=ppt/slideMasters/slideMaster1.xml><?xml version="1.0" encoding="utf-8"?>
 <p:sldMaster xmlns:a="http://schemas.openxmlformats.org/drawingml/2006/main" xmlns:r="http://schemas.openxmlformats.org/officeDocument/2006/relationships" xmlns:p="http://schemas.openxmlformats.org/presentationml/2006/main">
   <p:cSld>
+    <p:bg>
+      <p:bgRef idx="1001">
+        <a:schemeClr val="bg1"/>
+      </p:bgRef>
+    </p:bg>
     <p:spTree>
       <p:nvGrpSpPr>
         <p:cNvPr id="1" name=""/>
@@ -1660,6 +1451,7 @@
         <a:solidFill>
           <a:srgbClr val="0B0E14"/>
         </a:solidFill>
+        <a:effectLst/>
       </p:bgPr>
     </p:bg>
     <p:spTree>
@@ -1702,6 +1494,13 @@
             <a:prstDash val="solid"/>
           </a:ln>
         </p:spPr>
+        <p:txBody>
+          <a:bodyPr/>
+          <a:lstStyle/>
+          <a:p>
+            <a:endParaRPr lang="en-US"/>
+          </a:p>
+        </p:txBody>
       </p:sp>
       <p:sp>
         <p:nvSpPr>
@@ -1729,6 +1528,13 @@
             <a:prstDash val="solid"/>
           </a:ln>
         </p:spPr>
+        <p:txBody>
+          <a:bodyPr/>
+          <a:lstStyle/>
+          <a:p>
+            <a:endParaRPr lang="en-US"/>
+          </a:p>
+        </p:txBody>
       </p:sp>
       <p:sp>
         <p:nvSpPr>
@@ -1756,6 +1562,13 @@
             <a:prstDash val="solid"/>
           </a:ln>
         </p:spPr>
+        <p:txBody>
+          <a:bodyPr/>
+          <a:lstStyle/>
+          <a:p>
+            <a:endParaRPr lang="en-US"/>
+          </a:p>
+        </p:txBody>
       </p:sp>
       <p:sp>
         <p:nvSpPr>
@@ -1783,17 +1596,24 @@
             <a:prstDash val="solid"/>
           </a:ln>
         </p:spPr>
+        <p:txBody>
+          <a:bodyPr/>
+          <a:lstStyle/>
+          <a:p>
+            <a:endParaRPr lang="en-US"/>
+          </a:p>
+        </p:txBody>
       </p:sp>
       <p:pic>
         <p:nvPicPr>
-          <p:cNvPr id="6" name="Image 0" descr="C:/Users/neuma_p1qrsic/Repo/agentic-ops1/.scratch/brisken-logo-light.png">    </p:cNvPr>
+          <p:cNvPr id="6" name="Image 0" descr="C:/Users/neuma_p1qrsic/Repo/agentic-ops1/.scratch/brisken-logo-light.png"/>
           <p:cNvPicPr>
             <a:picLocks noChangeAspect="1"/>
           </p:cNvPicPr>
           <p:nvPr/>
         </p:nvPicPr>
         <p:blipFill>
-          <a:blip r:embed="rId1"/>
+          <a:blip r:embed="rId3"/>
           <a:stretch>
             <a:fillRect/>
           </a:stretch>
@@ -1834,6 +1654,13 @@
             <a:prstDash val="solid"/>
           </a:ln>
         </p:spPr>
+        <p:txBody>
+          <a:bodyPr/>
+          <a:lstStyle/>
+          <a:p>
+            <a:endParaRPr lang="en-US"/>
+          </a:p>
+        </p:txBody>
       </p:sp>
       <p:sp>
         <p:nvSpPr>
@@ -1856,7 +1683,7 @@
           <a:bodyPr wrap="square" rtlCol="0" anchor="ctr"/>
           <a:lstStyle/>
           <a:p>
-            <a:pPr algn="ctr" indent="0" marL="0">
+            <a:pPr marL="0" indent="0" algn="ctr">
               <a:buNone/>
             </a:pPr>
             <a:r>
@@ -1870,9 +1697,6 @@
               </a:rPr>
               <a:t>Prepared for  </a:t>
             </a:r>
-            <a:pPr algn="ctr" indent="0" marL="0">
-              <a:buNone/>
-            </a:pPr>
             <a:r>
               <a:rPr lang="en-US" sz="1100" b="1" dirty="0">
                 <a:solidFill>
@@ -1912,6 +1736,13 @@
             <a:prstDash val="solid"/>
           </a:ln>
         </p:spPr>
+        <p:txBody>
+          <a:bodyPr/>
+          <a:lstStyle/>
+          <a:p>
+            <a:endParaRPr lang="en-US"/>
+          </a:p>
+        </p:txBody>
       </p:sp>
       <p:sp>
         <p:nvSpPr>
@@ -1934,11 +1765,11 @@
           <a:bodyPr wrap="square" rtlCol="0" anchor="ctr"/>
           <a:lstStyle/>
           <a:p>
-            <a:pPr algn="l" indent="0" marL="0">
+            <a:pPr marL="0" indent="0" algn="l">
               <a:buNone/>
             </a:pPr>
             <a:r>
-              <a:rPr lang="en-US" sz="1200" b="1" spc="200" kern="0" dirty="0">
+              <a:rPr lang="en-US" sz="1200" b="1" kern="0" spc="200" dirty="0">
                 <a:solidFill>
                   <a:srgbClr val="3BE3E0"/>
                 </a:solidFill>
@@ -1973,7 +1804,7 @@
           <a:bodyPr wrap="square" rtlCol="0" anchor="ctr"/>
           <a:lstStyle/>
           <a:p>
-            <a:pPr indent="0" marL="0">
+            <a:pPr marL="0" indent="0">
               <a:buNone/>
             </a:pPr>
             <a:r>
@@ -2012,7 +1843,7 @@
           <a:bodyPr wrap="square" rtlCol="0" anchor="t"/>
           <a:lstStyle/>
           <a:p>
-            <a:pPr indent="0" marL="0">
+            <a:pPr marL="0" indent="0">
               <a:lnSpc>
                 <a:spcPct val="115000"/>
               </a:lnSpc>
@@ -2029,12 +1860,6 @@
               </a:rPr>
               <a:t>One cockpit for the whole treasury, on your live SAP data. </a:t>
             </a:r>
-            <a:pPr indent="0" marL="0">
-              <a:lnSpc>
-                <a:spcPct val="115000"/>
-              </a:lnSpc>
-              <a:buNone/>
-            </a:pPr>
             <a:r>
               <a:rPr lang="en-US" sz="2000" dirty="0">
                 <a:solidFill>
@@ -2076,17 +1901,24 @@
             <a:prstDash val="solid"/>
           </a:ln>
         </p:spPr>
+        <p:txBody>
+          <a:bodyPr/>
+          <a:lstStyle/>
+          <a:p>
+            <a:endParaRPr lang="en-US"/>
+          </a:p>
+        </p:txBody>
       </p:sp>
       <p:pic>
         <p:nvPicPr>
-          <p:cNvPr id="14" name="Image 1" descr="C:/Users/neuma_p1qrsic/Repo/agentic-ops1/.scratch/icons/database.png">    </p:cNvPr>
+          <p:cNvPr id="14" name="Image 1" descr="C:/Users/neuma_p1qrsic/Repo/agentic-ops1/.scratch/icons/database.png"/>
           <p:cNvPicPr>
             <a:picLocks noChangeAspect="1"/>
           </p:cNvPicPr>
           <p:nvPr/>
         </p:nvPicPr>
         <p:blipFill>
-          <a:blip r:embed="rId2"/>
+          <a:blip r:embed="rId4"/>
           <a:stretch>
             <a:fillRect/>
           </a:stretch>
@@ -2122,7 +1954,7 @@
           <a:bodyPr wrap="square" rtlCol="0" anchor="ctr"/>
           <a:lstStyle/>
           <a:p>
-            <a:pPr indent="0" marL="0">
+            <a:pPr marL="0" indent="0">
               <a:buNone/>
             </a:pPr>
             <a:r>
@@ -2163,6 +1995,13 @@
             <a:tailEnd type="triangle"/>
           </a:ln>
         </p:spPr>
+        <p:txBody>
+          <a:bodyPr/>
+          <a:lstStyle/>
+          <a:p>
+            <a:endParaRPr lang="en-US"/>
+          </a:p>
+        </p:txBody>
       </p:sp>
       <p:sp>
         <p:nvSpPr>
@@ -2185,7 +2024,7 @@
           <a:bodyPr wrap="square" rtlCol="0" anchor="ctr"/>
           <a:lstStyle/>
           <a:p>
-            <a:pPr algn="ctr" indent="0" marL="0">
+            <a:pPr marL="0" indent="0" algn="ctr">
               <a:buNone/>
             </a:pPr>
             <a:r>
@@ -2226,6 +2065,13 @@
             <a:tailEnd type="triangle"/>
           </a:ln>
         </p:spPr>
+        <p:txBody>
+          <a:bodyPr/>
+          <a:lstStyle/>
+          <a:p>
+            <a:endParaRPr lang="en-US"/>
+          </a:p>
+        </p:txBody>
       </p:sp>
       <p:sp>
         <p:nvSpPr>
@@ -2253,17 +2099,24 @@
             <a:prstDash val="solid"/>
           </a:ln>
         </p:spPr>
+        <p:txBody>
+          <a:bodyPr/>
+          <a:lstStyle/>
+          <a:p>
+            <a:endParaRPr lang="en-US"/>
+          </a:p>
+        </p:txBody>
       </p:sp>
       <p:pic>
         <p:nvPicPr>
-          <p:cNvPr id="20" name="Image 2" descr="C:/Users/neuma_p1qrsic/Repo/agentic-ops1/.scratch/icons/gauge.png">    </p:cNvPr>
+          <p:cNvPr id="20" name="Image 2" descr="C:/Users/neuma_p1qrsic/Repo/agentic-ops1/.scratch/icons/gauge.png"/>
           <p:cNvPicPr>
             <a:picLocks noChangeAspect="1"/>
           </p:cNvPicPr>
           <p:nvPr/>
         </p:nvPicPr>
         <p:blipFill>
-          <a:blip r:embed="rId3"/>
+          <a:blip r:embed="rId5"/>
           <a:stretch>
             <a:fillRect/>
           </a:stretch>
@@ -2299,7 +2152,7 @@
           <a:bodyPr wrap="square" rtlCol="0" anchor="ctr"/>
           <a:lstStyle/>
           <a:p>
-            <a:pPr indent="0" marL="0">
+            <a:pPr marL="0" indent="0">
               <a:buNone/>
             </a:pPr>
             <a:r>
@@ -2333,6 +2186,7 @@
         <a:solidFill>
           <a:srgbClr val="0B0E14"/>
         </a:solidFill>
+        <a:effectLst/>
       </p:bgPr>
     </p:bg>
     <p:spTree>
@@ -2357,7 +2211,7 @@
         </p:nvSpPr>
         <p:spPr>
           <a:xfrm>
-            <a:off x="3072384" y="0"/>
+            <a:off x="3072384" y="1280160"/>
             <a:ext cx="6035040" cy="6035040"/>
           </a:xfrm>
           <a:prstGeom prst="ellipse">
@@ -2375,6 +2229,13 @@
             <a:prstDash val="solid"/>
           </a:ln>
         </p:spPr>
+        <p:txBody>
+          <a:bodyPr/>
+          <a:lstStyle/>
+          <a:p>
+            <a:endParaRPr lang="en-US"/>
+          </a:p>
+        </p:txBody>
       </p:sp>
       <p:sp>
         <p:nvSpPr>
@@ -2384,7 +2245,7 @@
         </p:nvSpPr>
         <p:spPr>
           <a:xfrm>
-            <a:off x="4443984" y="1371600"/>
+            <a:off x="4443984" y="2651760"/>
             <a:ext cx="3291840" cy="3291840"/>
           </a:xfrm>
           <a:prstGeom prst="ellipse">
@@ -2402,17 +2263,24 @@
             <a:prstDash val="solid"/>
           </a:ln>
         </p:spPr>
+        <p:txBody>
+          <a:bodyPr/>
+          <a:lstStyle/>
+          <a:p>
+            <a:endParaRPr lang="en-US"/>
+          </a:p>
+        </p:txBody>
       </p:sp>
       <p:pic>
         <p:nvPicPr>
-          <p:cNvPr id="4" name="Image 0" descr="C:/Users/neuma_p1qrsic/Repo/agentic-ops1/.scratch/brisken-logo-light.png">    </p:cNvPr>
+          <p:cNvPr id="4" name="Image 0" descr="C:/Users/neuma_p1qrsic/Repo/agentic-ops1/.scratch/brisken-logo-light.png"/>
           <p:cNvPicPr>
             <a:picLocks noChangeAspect="1"/>
           </p:cNvPicPr>
           <p:nvPr/>
         </p:nvPicPr>
         <p:blipFill>
-          <a:blip r:embed="rId1"/>
+          <a:blip r:embed="rId3"/>
           <a:stretch>
             <a:fillRect/>
           </a:stretch>
@@ -2448,7 +2316,7 @@
           <a:bodyPr wrap="square" rtlCol="0" anchor="ctr"/>
           <a:lstStyle/>
           <a:p>
-            <a:pPr algn="ctr" indent="0" marL="0">
+            <a:pPr marL="0" indent="0" algn="ctr">
               <a:buNone/>
             </a:pPr>
             <a:r>
@@ -2487,7 +2355,7 @@
           <a:bodyPr wrap="square" rtlCol="0" anchor="ctr"/>
           <a:lstStyle/>
           <a:p>
-            <a:pPr algn="ctr" indent="0" marL="0">
+            <a:pPr marL="0" indent="0" algn="ctr">
               <a:lnSpc>
                 <a:spcPct val="125000"/>
               </a:lnSpc>
@@ -2534,6 +2402,13 @@
             <a:prstDash val="solid"/>
           </a:ln>
         </p:spPr>
+        <p:txBody>
+          <a:bodyPr/>
+          <a:lstStyle/>
+          <a:p>
+            <a:endParaRPr lang="en-US"/>
+          </a:p>
+        </p:txBody>
       </p:sp>
       <p:sp>
         <p:nvSpPr>
@@ -2556,7 +2431,7 @@
           <a:bodyPr wrap="square" rtlCol="0" anchor="ctr"/>
           <a:lstStyle/>
           <a:p>
-            <a:pPr algn="ctr" indent="0" marL="0">
+            <a:pPr marL="0" indent="0" algn="ctr">
               <a:buNone/>
             </a:pPr>
             <a:r>
@@ -2595,7 +2470,7 @@
           <a:bodyPr wrap="square" rtlCol="0" anchor="ctr"/>
           <a:lstStyle/>
           <a:p>
-            <a:pPr algn="ctr" indent="0" marL="0">
+            <a:pPr marL="0" indent="0" algn="ctr">
               <a:buNone/>
             </a:pPr>
             <a:r>
@@ -2629,6 +2504,7 @@
         <a:solidFill>
           <a:srgbClr val="0B0E14"/>
         </a:solidFill>
+        <a:effectLst/>
       </p:bgPr>
     </p:bg>
     <p:spTree>
@@ -2669,6 +2545,13 @@
             <a:prstDash val="solid"/>
           </a:ln>
         </p:spPr>
+        <p:txBody>
+          <a:bodyPr/>
+          <a:lstStyle/>
+          <a:p>
+            <a:endParaRPr lang="en-US"/>
+          </a:p>
+        </p:txBody>
       </p:sp>
       <p:sp>
         <p:nvSpPr>
@@ -2691,11 +2574,11 @@
           <a:bodyPr wrap="square" rtlCol="0" anchor="ctr"/>
           <a:lstStyle/>
           <a:p>
-            <a:pPr algn="l" indent="0" marL="0">
+            <a:pPr marL="0" indent="0" algn="l">
               <a:buNone/>
             </a:pPr>
             <a:r>
-              <a:rPr lang="en-US" sz="1200" b="1" spc="200" kern="0" dirty="0">
+              <a:rPr lang="en-US" sz="1200" b="1" kern="0" spc="200" dirty="0">
                 <a:solidFill>
                   <a:srgbClr val="3BE3E0"/>
                 </a:solidFill>
@@ -2730,7 +2613,7 @@
           <a:bodyPr wrap="square" rtlCol="0" anchor="ctr"/>
           <a:lstStyle/>
           <a:p>
-            <a:pPr indent="0" marL="0">
+            <a:pPr marL="0" indent="0">
               <a:lnSpc>
                 <a:spcPct val="105000"/>
               </a:lnSpc>
@@ -2748,12 +2631,6 @@
               <a:t>Treasury is expected to deliver on SAP, fast.
 </a:t>
             </a:r>
-            <a:pPr indent="0" marL="0">
-              <a:lnSpc>
-                <a:spcPct val="105000"/>
-              </a:lnSpc>
-              <a:buNone/>
-            </a:pPr>
             <a:r>
               <a:rPr lang="en-US" sz="3300" b="1" dirty="0">
                 <a:solidFill>
@@ -2795,6 +2672,13 @@
             <a:prstDash val="solid"/>
           </a:ln>
         </p:spPr>
+        <p:txBody>
+          <a:bodyPr/>
+          <a:lstStyle/>
+          <a:p>
+            <a:endParaRPr lang="en-US"/>
+          </a:p>
+        </p:txBody>
       </p:sp>
       <p:sp>
         <p:nvSpPr>
@@ -2822,17 +2706,24 @@
             <a:prstDash val="solid"/>
           </a:ln>
         </p:spPr>
+        <p:txBody>
+          <a:bodyPr/>
+          <a:lstStyle/>
+          <a:p>
+            <a:endParaRPr lang="en-US"/>
+          </a:p>
+        </p:txBody>
       </p:sp>
       <p:pic>
         <p:nvPicPr>
-          <p:cNvPr id="7" name="Image 0" descr="C:/Users/neuma_p1qrsic/Repo/agentic-ops1/.scratch/icons/venue.png">    </p:cNvPr>
+          <p:cNvPr id="7" name="Image 0" descr="C:/Users/neuma_p1qrsic/Repo/agentic-ops1/.scratch/icons/venue.png"/>
           <p:cNvPicPr>
             <a:picLocks noChangeAspect="1"/>
           </p:cNvPicPr>
           <p:nvPr/>
         </p:nvPicPr>
         <p:blipFill>
-          <a:blip r:embed="rId1"/>
+          <a:blip r:embed="rId3"/>
           <a:stretch>
             <a:fillRect/>
           </a:stretch>
@@ -2868,7 +2759,7 @@
           <a:bodyPr wrap="square" rtlCol="0" anchor="ctr"/>
           <a:lstStyle/>
           <a:p>
-            <a:pPr indent="0" marL="0">
+            <a:pPr marL="0" indent="0">
               <a:buNone/>
             </a:pPr>
             <a:r>
@@ -2907,7 +2798,7 @@
           <a:bodyPr wrap="square" rtlCol="0" anchor="ctr"/>
           <a:lstStyle/>
           <a:p>
-            <a:pPr indent="0" marL="0">
+            <a:pPr marL="0" indent="0">
               <a:buNone/>
             </a:pPr>
             <a:r>
@@ -2951,17 +2842,24 @@
             <a:prstDash val="dash"/>
           </a:ln>
         </p:spPr>
+        <p:txBody>
+          <a:bodyPr/>
+          <a:lstStyle/>
+          <a:p>
+            <a:endParaRPr lang="en-US"/>
+          </a:p>
+        </p:txBody>
       </p:sp>
       <p:pic>
         <p:nvPicPr>
-          <p:cNvPr id="11" name="Image 1" descr="C:/Users/neuma_p1qrsic/Repo/agentic-ops1/.scratch/icons/gap.png">    </p:cNvPr>
+          <p:cNvPr id="11" name="Image 1" descr="C:/Users/neuma_p1qrsic/Repo/agentic-ops1/.scratch/icons/gap.png"/>
           <p:cNvPicPr>
             <a:picLocks noChangeAspect="1"/>
           </p:cNvPicPr>
           <p:nvPr/>
         </p:nvPicPr>
         <p:blipFill>
-          <a:blip r:embed="rId2"/>
+          <a:blip r:embed="rId4"/>
           <a:stretch>
             <a:fillRect/>
           </a:stretch>
@@ -2997,7 +2895,7 @@
           <a:bodyPr wrap="square" rtlCol="0" anchor="ctr"/>
           <a:lstStyle/>
           <a:p>
-            <a:pPr algn="ctr" indent="0" marL="0">
+            <a:pPr marL="0" indent="0" algn="ctr">
               <a:buNone/>
             </a:pPr>
             <a:r>
@@ -3036,7 +2934,7 @@
           <a:bodyPr wrap="square" rtlCol="0" anchor="ctr"/>
           <a:lstStyle/>
           <a:p>
-            <a:pPr algn="ctr" indent="0" marL="0">
+            <a:pPr marL="0" indent="0" algn="ctr">
               <a:lnSpc>
                 <a:spcPct val="105000"/>
               </a:lnSpc>
@@ -3083,6 +2981,13 @@
             <a:prstDash val="solid"/>
           </a:ln>
         </p:spPr>
+        <p:txBody>
+          <a:bodyPr/>
+          <a:lstStyle/>
+          <a:p>
+            <a:endParaRPr lang="en-US"/>
+          </a:p>
+        </p:txBody>
       </p:sp>
       <p:sp>
         <p:nvSpPr>
@@ -3110,17 +3015,24 @@
             <a:prstDash val="solid"/>
           </a:ln>
         </p:spPr>
+        <p:txBody>
+          <a:bodyPr/>
+          <a:lstStyle/>
+          <a:p>
+            <a:endParaRPr lang="en-US"/>
+          </a:p>
+        </p:txBody>
       </p:sp>
       <p:pic>
         <p:nvPicPr>
-          <p:cNvPr id="16" name="Image 2" descr="C:/Users/neuma_p1qrsic/Repo/agentic-ops1/.scratch/icons/database.png">    </p:cNvPr>
+          <p:cNvPr id="16" name="Image 2" descr="C:/Users/neuma_p1qrsic/Repo/agentic-ops1/.scratch/icons/database.png"/>
           <p:cNvPicPr>
             <a:picLocks noChangeAspect="1"/>
           </p:cNvPicPr>
           <p:nvPr/>
         </p:nvPicPr>
         <p:blipFill>
-          <a:blip r:embed="rId3"/>
+          <a:blip r:embed="rId5"/>
           <a:stretch>
             <a:fillRect/>
           </a:stretch>
@@ -3156,7 +3068,7 @@
           <a:bodyPr wrap="square" rtlCol="0" anchor="ctr"/>
           <a:lstStyle/>
           <a:p>
-            <a:pPr indent="0" marL="0">
+            <a:pPr marL="0" indent="0">
               <a:buNone/>
             </a:pPr>
             <a:r>
@@ -3195,7 +3107,7 @@
           <a:bodyPr wrap="square" rtlCol="0" anchor="ctr"/>
           <a:lstStyle/>
           <a:p>
-            <a:pPr indent="0" marL="0">
+            <a:pPr marL="0" indent="0">
               <a:buNone/>
             </a:pPr>
             <a:r>
@@ -3236,6 +3148,13 @@
             <a:tailEnd type="triangle"/>
           </a:ln>
         </p:spPr>
+        <p:txBody>
+          <a:bodyPr/>
+          <a:lstStyle/>
+          <a:p>
+            <a:endParaRPr lang="en-US"/>
+          </a:p>
+        </p:txBody>
       </p:sp>
       <p:sp>
         <p:nvSpPr>
@@ -3260,6 +3179,13 @@
             <a:tailEnd type="triangle"/>
           </a:ln>
         </p:spPr>
+        <p:txBody>
+          <a:bodyPr/>
+          <a:lstStyle/>
+          <a:p>
+            <a:endParaRPr lang="en-US"/>
+          </a:p>
+        </p:txBody>
       </p:sp>
       <p:sp>
         <p:nvSpPr>
@@ -3282,7 +3208,7 @@
           <a:bodyPr wrap="square" rtlCol="0" anchor="ctr"/>
           <a:lstStyle/>
           <a:p>
-            <a:pPr indent="0" marL="0">
+            <a:pPr marL="0" indent="0">
               <a:buNone/>
             </a:pPr>
             <a:r>
@@ -3321,7 +3247,7 @@
           <a:bodyPr wrap="square" rtlCol="0" anchor="ctr"/>
           <a:lstStyle/>
           <a:p>
-            <a:pPr algn="l" indent="0" marL="0">
+            <a:pPr marL="0" indent="0" algn="l">
               <a:buNone/>
             </a:pPr>
             <a:r>
@@ -3335,9 +3261,6 @@
               </a:rPr>
               <a:t>Brisken</a:t>
             </a:r>
-            <a:pPr algn="l" indent="0" marL="0">
-              <a:buNone/>
-            </a:pPr>
             <a:r>
               <a:rPr lang="en-US" sz="900" dirty="0">
                 <a:solidFill>
@@ -3374,7 +3297,7 @@
           <a:bodyPr wrap="square" rtlCol="0" anchor="ctr"/>
           <a:lstStyle/>
           <a:p>
-            <a:pPr algn="r" indent="0" marL="0">
+            <a:pPr marL="0" indent="0" algn="r">
               <a:buNone/>
             </a:pPr>
             <a:r>
@@ -3414,6 +3337,13 @@
             <a:prstDash val="solid"/>
           </a:ln>
         </p:spPr>
+        <p:txBody>
+          <a:bodyPr/>
+          <a:lstStyle/>
+          <a:p>
+            <a:endParaRPr lang="en-US"/>
+          </a:p>
+        </p:txBody>
       </p:sp>
     </p:spTree>
   </p:cSld>
@@ -3431,6 +3361,7 @@
         <a:solidFill>
           <a:srgbClr val="0B0E14"/>
         </a:solidFill>
+        <a:effectLst/>
       </p:bgPr>
     </p:bg>
     <p:spTree>
@@ -3471,6 +3402,13 @@
             <a:prstDash val="solid"/>
           </a:ln>
         </p:spPr>
+        <p:txBody>
+          <a:bodyPr/>
+          <a:lstStyle/>
+          <a:p>
+            <a:endParaRPr lang="en-US"/>
+          </a:p>
+        </p:txBody>
       </p:sp>
       <p:sp>
         <p:nvSpPr>
@@ -3493,11 +3431,11 @@
           <a:bodyPr wrap="square" rtlCol="0" anchor="ctr"/>
           <a:lstStyle/>
           <a:p>
-            <a:pPr algn="l" indent="0" marL="0">
+            <a:pPr marL="0" indent="0" algn="l">
               <a:buNone/>
             </a:pPr>
             <a:r>
-              <a:rPr lang="en-US" sz="1200" b="1" spc="200" kern="0" dirty="0">
+              <a:rPr lang="en-US" sz="1200" b="1" kern="0" spc="200" dirty="0">
                 <a:solidFill>
                   <a:srgbClr val="3BE3E0"/>
                 </a:solidFill>
@@ -3532,7 +3470,7 @@
           <a:bodyPr wrap="square" rtlCol="0" anchor="ctr"/>
           <a:lstStyle/>
           <a:p>
-            <a:pPr indent="0" marL="0">
+            <a:pPr marL="0" indent="0">
               <a:buNone/>
             </a:pPr>
             <a:r>
@@ -3571,7 +3509,7 @@
           <a:bodyPr wrap="square" rtlCol="0" anchor="t"/>
           <a:lstStyle/>
           <a:p>
-            <a:pPr indent="0" marL="0">
+            <a:pPr marL="0" indent="0">
               <a:lnSpc>
                 <a:spcPct val="128000"/>
               </a:lnSpc>
@@ -3588,12 +3526,6 @@
               </a:rPr>
               <a:t>The command center your team runs treasury from, on live SAP data, with market data, trading, and AI automation and orchestration around it. </a:t>
             </a:r>
-            <a:pPr indent="0" marL="0">
-              <a:lnSpc>
-                <a:spcPct val="128000"/>
-              </a:lnSpc>
-              <a:buNone/>
-            </a:pPr>
             <a:r>
               <a:rPr lang="en-US" sz="1650" dirty="0">
                 <a:solidFill>
@@ -3635,6 +3567,13 @@
             <a:prstDash val="solid"/>
           </a:ln>
         </p:spPr>
+        <p:txBody>
+          <a:bodyPr/>
+          <a:lstStyle/>
+          <a:p>
+            <a:endParaRPr lang="en-US"/>
+          </a:p>
+        </p:txBody>
       </p:sp>
       <p:sp>
         <p:nvSpPr>
@@ -3662,17 +3601,24 @@
             <a:prstDash val="solid"/>
           </a:ln>
         </p:spPr>
+        <p:txBody>
+          <a:bodyPr/>
+          <a:lstStyle/>
+          <a:p>
+            <a:endParaRPr lang="en-US"/>
+          </a:p>
+        </p:txBody>
       </p:sp>
       <p:pic>
         <p:nvPicPr>
-          <p:cNvPr id="8" name="Image 0" descr="C:/Users/neuma_p1qrsic/Repo/agentic-ops1/.scratch/icons/link.png">    </p:cNvPr>
+          <p:cNvPr id="8" name="Image 0" descr="C:/Users/neuma_p1qrsic/Repo/agentic-ops1/.scratch/icons/link.png"/>
           <p:cNvPicPr>
             <a:picLocks noChangeAspect="1"/>
           </p:cNvPicPr>
           <p:nvPr/>
         </p:nvPicPr>
         <p:blipFill>
-          <a:blip r:embed="rId1"/>
+          <a:blip r:embed="rId3"/>
           <a:stretch>
             <a:fillRect/>
           </a:stretch>
@@ -3708,7 +3654,7 @@
           <a:bodyPr wrap="square" rtlCol="0" anchor="ctr"/>
           <a:lstStyle/>
           <a:p>
-            <a:pPr indent="0" marL="0">
+            <a:pPr marL="0" indent="0">
               <a:buNone/>
             </a:pPr>
             <a:r>
@@ -3747,7 +3693,7 @@
           <a:bodyPr wrap="square" rtlCol="0" anchor="t"/>
           <a:lstStyle/>
           <a:p>
-            <a:pPr indent="0" marL="0">
+            <a:pPr marL="0" indent="0">
               <a:lnSpc>
                 <a:spcPct val="112000"/>
               </a:lnSpc>
@@ -3794,6 +3740,13 @@
             <a:prstDash val="solid"/>
           </a:ln>
         </p:spPr>
+        <p:txBody>
+          <a:bodyPr/>
+          <a:lstStyle/>
+          <a:p>
+            <a:endParaRPr lang="en-US"/>
+          </a:p>
+        </p:txBody>
       </p:sp>
       <p:sp>
         <p:nvSpPr>
@@ -3821,17 +3774,24 @@
             <a:prstDash val="solid"/>
           </a:ln>
         </p:spPr>
+        <p:txBody>
+          <a:bodyPr/>
+          <a:lstStyle/>
+          <a:p>
+            <a:endParaRPr lang="en-US"/>
+          </a:p>
+        </p:txBody>
       </p:sp>
       <p:pic>
         <p:nvPicPr>
-          <p:cNvPr id="13" name="Image 1" descr="C:/Users/neuma_p1qrsic/Repo/agentic-ops1/.scratch/icons/merge.png">    </p:cNvPr>
+          <p:cNvPr id="13" name="Image 1" descr="C:/Users/neuma_p1qrsic/Repo/agentic-ops1/.scratch/icons/merge.png"/>
           <p:cNvPicPr>
             <a:picLocks noChangeAspect="1"/>
           </p:cNvPicPr>
           <p:nvPr/>
         </p:nvPicPr>
         <p:blipFill>
-          <a:blip r:embed="rId2"/>
+          <a:blip r:embed="rId4"/>
           <a:stretch>
             <a:fillRect/>
           </a:stretch>
@@ -3867,7 +3827,7 @@
           <a:bodyPr wrap="square" rtlCol="0" anchor="ctr"/>
           <a:lstStyle/>
           <a:p>
-            <a:pPr indent="0" marL="0">
+            <a:pPr marL="0" indent="0">
               <a:buNone/>
             </a:pPr>
             <a:r>
@@ -3906,7 +3866,7 @@
           <a:bodyPr wrap="square" rtlCol="0" anchor="t"/>
           <a:lstStyle/>
           <a:p>
-            <a:pPr indent="0" marL="0">
+            <a:pPr marL="0" indent="0">
               <a:lnSpc>
                 <a:spcPct val="112000"/>
               </a:lnSpc>
@@ -3953,6 +3913,13 @@
             <a:prstDash val="solid"/>
           </a:ln>
         </p:spPr>
+        <p:txBody>
+          <a:bodyPr/>
+          <a:lstStyle/>
+          <a:p>
+            <a:endParaRPr lang="en-US"/>
+          </a:p>
+        </p:txBody>
       </p:sp>
       <p:sp>
         <p:nvSpPr>
@@ -3980,17 +3947,24 @@
             <a:prstDash val="solid"/>
           </a:ln>
         </p:spPr>
+        <p:txBody>
+          <a:bodyPr/>
+          <a:lstStyle/>
+          <a:p>
+            <a:endParaRPr lang="en-US"/>
+          </a:p>
+        </p:txBody>
       </p:sp>
       <p:pic>
         <p:nvPicPr>
-          <p:cNvPr id="18" name="Image 2" descr="C:/Users/neuma_p1qrsic/Repo/agentic-ops1/.scratch/icons/spark.png">    </p:cNvPr>
+          <p:cNvPr id="18" name="Image 2" descr="C:/Users/neuma_p1qrsic/Repo/agentic-ops1/.scratch/icons/spark.png"/>
           <p:cNvPicPr>
             <a:picLocks noChangeAspect="1"/>
           </p:cNvPicPr>
           <p:nvPr/>
         </p:nvPicPr>
         <p:blipFill>
-          <a:blip r:embed="rId3"/>
+          <a:blip r:embed="rId5"/>
           <a:stretch>
             <a:fillRect/>
           </a:stretch>
@@ -4026,7 +4000,7 @@
           <a:bodyPr wrap="square" rtlCol="0" anchor="ctr"/>
           <a:lstStyle/>
           <a:p>
-            <a:pPr indent="0" marL="0">
+            <a:pPr marL="0" indent="0">
               <a:buNone/>
             </a:pPr>
             <a:r>
@@ -4065,7 +4039,7 @@
           <a:bodyPr wrap="square" rtlCol="0" anchor="t"/>
           <a:lstStyle/>
           <a:p>
-            <a:pPr indent="0" marL="0">
+            <a:pPr marL="0" indent="0">
               <a:lnSpc>
                 <a:spcPct val="112000"/>
               </a:lnSpc>
@@ -4112,17 +4086,24 @@
             <a:prstDash val="solid"/>
           </a:ln>
         </p:spPr>
+        <p:txBody>
+          <a:bodyPr/>
+          <a:lstStyle/>
+          <a:p>
+            <a:endParaRPr lang="en-US"/>
+          </a:p>
+        </p:txBody>
       </p:sp>
       <p:pic>
         <p:nvPicPr>
-          <p:cNvPr id="22" name="Image 3" descr="C:/Users/neuma_p1qrsic/Repo/agentic-ops1/.scratch/logo/favicon.png">    </p:cNvPr>
+          <p:cNvPr id="22" name="Image 3" descr="C:/Users/neuma_p1qrsic/Repo/agentic-ops1/.scratch/logo/favicon.png"/>
           <p:cNvPicPr>
             <a:picLocks noChangeAspect="1"/>
           </p:cNvPicPr>
           <p:nvPr/>
         </p:nvPicPr>
         <p:blipFill>
-          <a:blip r:embed="rId4"/>
+          <a:blip r:embed="rId6"/>
           <a:stretch>
             <a:fillRect/>
           </a:stretch>
@@ -4158,7 +4139,7 @@
           <a:bodyPr wrap="square" rtlCol="0" anchor="ctr"/>
           <a:lstStyle/>
           <a:p>
-            <a:pPr indent="0" marL="0">
+            <a:pPr marL="0" indent="0">
               <a:lnSpc>
                 <a:spcPct val="110000"/>
               </a:lnSpc>
@@ -4175,12 +4156,6 @@
               </a:rPr>
               <a:t>All of it runs on </a:t>
             </a:r>
-            <a:pPr indent="0" marL="0">
-              <a:lnSpc>
-                <a:spcPct val="110000"/>
-              </a:lnSpc>
-              <a:buNone/>
-            </a:pPr>
             <a:r>
               <a:rPr lang="en-US" sz="1400" b="1" dirty="0">
                 <a:solidFill>
@@ -4192,12 +4167,6 @@
               </a:rPr>
               <a:t>OnePilot</a:t>
             </a:r>
-            <a:pPr indent="0" marL="0">
-              <a:lnSpc>
-                <a:spcPct val="110000"/>
-              </a:lnSpc>
-              <a:buNone/>
-            </a:pPr>
             <a:r>
               <a:rPr lang="en-US" sz="1400" dirty="0">
                 <a:solidFill>
@@ -4234,7 +4203,7 @@
           <a:bodyPr wrap="square" rtlCol="0" anchor="ctr"/>
           <a:lstStyle/>
           <a:p>
-            <a:pPr algn="l" indent="0" marL="0">
+            <a:pPr marL="0" indent="0" algn="l">
               <a:buNone/>
             </a:pPr>
             <a:r>
@@ -4248,9 +4217,6 @@
               </a:rPr>
               <a:t>Brisken</a:t>
             </a:r>
-            <a:pPr algn="l" indent="0" marL="0">
-              <a:buNone/>
-            </a:pPr>
             <a:r>
               <a:rPr lang="en-US" sz="900" dirty="0">
                 <a:solidFill>
@@ -4287,7 +4253,7 @@
           <a:bodyPr wrap="square" rtlCol="0" anchor="ctr"/>
           <a:lstStyle/>
           <a:p>
-            <a:pPr algn="r" indent="0" marL="0">
+            <a:pPr marL="0" indent="0" algn="r">
               <a:buNone/>
             </a:pPr>
             <a:r>
@@ -4327,6 +4293,13 @@
             <a:prstDash val="solid"/>
           </a:ln>
         </p:spPr>
+        <p:txBody>
+          <a:bodyPr/>
+          <a:lstStyle/>
+          <a:p>
+            <a:endParaRPr lang="en-US"/>
+          </a:p>
+        </p:txBody>
       </p:sp>
     </p:spTree>
   </p:cSld>
@@ -4344,6 +4317,7 @@
         <a:solidFill>
           <a:srgbClr val="0E121B"/>
         </a:solidFill>
+        <a:effectLst/>
       </p:bgPr>
     </p:bg>
     <p:spTree>
@@ -4384,6 +4358,13 @@
             <a:prstDash val="solid"/>
           </a:ln>
         </p:spPr>
+        <p:txBody>
+          <a:bodyPr/>
+          <a:lstStyle/>
+          <a:p>
+            <a:endParaRPr lang="en-US"/>
+          </a:p>
+        </p:txBody>
       </p:sp>
       <p:sp>
         <p:nvSpPr>
@@ -4406,11 +4387,11 @@
           <a:bodyPr wrap="square" rtlCol="0" anchor="ctr"/>
           <a:lstStyle/>
           <a:p>
-            <a:pPr algn="l" indent="0" marL="0">
+            <a:pPr marL="0" indent="0" algn="l">
               <a:buNone/>
             </a:pPr>
             <a:r>
-              <a:rPr lang="en-US" sz="1200" b="1" spc="200" kern="0" dirty="0">
+              <a:rPr lang="en-US" sz="1200" b="1" kern="0" spc="200" dirty="0">
                 <a:solidFill>
                   <a:srgbClr val="3BE3E0"/>
                 </a:solidFill>
@@ -4445,7 +4426,7 @@
           <a:bodyPr wrap="square" rtlCol="0" anchor="ctr"/>
           <a:lstStyle/>
           <a:p>
-            <a:pPr indent="0" marL="0">
+            <a:pPr marL="0" indent="0">
               <a:buNone/>
             </a:pPr>
             <a:r>
@@ -4489,6 +4470,13 @@
             <a:prstDash val="solid"/>
           </a:ln>
         </p:spPr>
+        <p:txBody>
+          <a:bodyPr/>
+          <a:lstStyle/>
+          <a:p>
+            <a:endParaRPr lang="en-US"/>
+          </a:p>
+        </p:txBody>
       </p:sp>
       <p:sp>
         <p:nvSpPr>
@@ -4516,17 +4504,24 @@
             <a:prstDash val="solid"/>
           </a:ln>
         </p:spPr>
+        <p:txBody>
+          <a:bodyPr/>
+          <a:lstStyle/>
+          <a:p>
+            <a:endParaRPr lang="en-US"/>
+          </a:p>
+        </p:txBody>
       </p:sp>
       <p:pic>
         <p:nvPicPr>
-          <p:cNvPr id="7" name="Image 0" descr="C:/Users/neuma_p1qrsic/Repo/agentic-ops1/.scratch/icons/link.png">    </p:cNvPr>
+          <p:cNvPr id="7" name="Image 0" descr="C:/Users/neuma_p1qrsic/Repo/agentic-ops1/.scratch/icons/link.png"/>
           <p:cNvPicPr>
             <a:picLocks noChangeAspect="1"/>
           </p:cNvPicPr>
           <p:nvPr/>
         </p:nvPicPr>
         <p:blipFill>
-          <a:blip r:embed="rId1"/>
+          <a:blip r:embed="rId3"/>
           <a:stretch>
             <a:fillRect/>
           </a:stretch>
@@ -4562,7 +4557,7 @@
           <a:bodyPr wrap="square" rtlCol="0" anchor="t"/>
           <a:lstStyle/>
           <a:p>
-            <a:pPr indent="0" marL="0">
+            <a:pPr marL="0" indent="0">
               <a:buNone/>
             </a:pPr>
             <a:r>
@@ -4601,7 +4596,7 @@
           <a:bodyPr wrap="square" rtlCol="0" anchor="t"/>
           <a:lstStyle/>
           <a:p>
-            <a:pPr indent="0" marL="0">
+            <a:pPr marL="0" indent="0">
               <a:lnSpc>
                 <a:spcPct val="120000"/>
               </a:lnSpc>
@@ -4616,7 +4611,7 @@
                 <a:ea typeface="Segoe UI" pitchFamily="34" charset="-122"/>
                 <a:cs typeface="Segoe UI" pitchFamily="34" charset="-120"/>
               </a:rPr>
-              <a:t>Every rate and reference you rely on, from any source to every system. Curated once, governed end to end.</a:t>
+              <a:t>Every rate and reference you rely on, from any source to every system.</a:t>
             </a:r>
             <a:endParaRPr lang="en-US" sz="1300" dirty="0"/>
           </a:p>
@@ -4648,17 +4643,24 @@
             <a:prstDash val="solid"/>
           </a:ln>
         </p:spPr>
+        <p:txBody>
+          <a:bodyPr/>
+          <a:lstStyle/>
+          <a:p>
+            <a:endParaRPr lang="en-US"/>
+          </a:p>
+        </p:txBody>
       </p:sp>
       <p:pic>
         <p:nvPicPr>
-          <p:cNvPr id="11" name="Image 1" descr="C:/Users/neuma_p1qrsic/Repo/agentic-ops1/.scratch/deckgen/logos/bloomberg.png">    </p:cNvPr>
+          <p:cNvPr id="11" name="Image 1" descr="C:/Users/neuma_p1qrsic/Repo/agentic-ops1/.scratch/deckgen/logos/bloomberg.png"/>
           <p:cNvPicPr>
             <a:picLocks noChangeAspect="1"/>
           </p:cNvPicPr>
           <p:nvPr/>
         </p:nvPicPr>
         <p:blipFill>
-          <a:blip r:embed="rId2"/>
+          <a:blip r:embed="rId4"/>
           <a:stretch>
             <a:fillRect/>
           </a:stretch>
@@ -4699,17 +4701,24 @@
             <a:prstDash val="solid"/>
           </a:ln>
         </p:spPr>
+        <p:txBody>
+          <a:bodyPr/>
+          <a:lstStyle/>
+          <a:p>
+            <a:endParaRPr lang="en-US"/>
+          </a:p>
+        </p:txBody>
       </p:sp>
       <p:pic>
         <p:nvPicPr>
-          <p:cNvPr id="13" name="Image 2" descr="C:/Users/neuma_p1qrsic/Repo/agentic-ops1/.scratch/deckgen/logos/lseg.png">    </p:cNvPr>
+          <p:cNvPr id="13" name="Image 2" descr="C:/Users/neuma_p1qrsic/Repo/agentic-ops1/.scratch/deckgen/logos/lseg.png"/>
           <p:cNvPicPr>
             <a:picLocks noChangeAspect="1"/>
           </p:cNvPicPr>
           <p:nvPr/>
         </p:nvPicPr>
         <p:blipFill>
-          <a:blip r:embed="rId3"/>
+          <a:blip r:embed="rId5"/>
           <a:stretch>
             <a:fillRect/>
           </a:stretch>
@@ -4750,17 +4759,24 @@
             <a:prstDash val="solid"/>
           </a:ln>
         </p:spPr>
+        <p:txBody>
+          <a:bodyPr/>
+          <a:lstStyle/>
+          <a:p>
+            <a:endParaRPr lang="en-US"/>
+          </a:p>
+        </p:txBody>
       </p:sp>
       <p:pic>
         <p:nvPicPr>
-          <p:cNvPr id="15" name="Image 3" descr="C:/Users/neuma_p1qrsic/Repo/agentic-ops1/.scratch/deckgen/logos/ice.png">    </p:cNvPr>
+          <p:cNvPr id="15" name="Image 3" descr="C:/Users/neuma_p1qrsic/Repo/agentic-ops1/.scratch/deckgen/logos/ice.png"/>
           <p:cNvPicPr>
             <a:picLocks noChangeAspect="1"/>
           </p:cNvPicPr>
           <p:nvPr/>
         </p:nvPicPr>
         <p:blipFill>
-          <a:blip r:embed="rId4"/>
+          <a:blip r:embed="rId6"/>
           <a:stretch>
             <a:fillRect/>
           </a:stretch>
@@ -4801,17 +4817,24 @@
             <a:prstDash val="solid"/>
           </a:ln>
         </p:spPr>
+        <p:txBody>
+          <a:bodyPr/>
+          <a:lstStyle/>
+          <a:p>
+            <a:endParaRPr lang="en-US"/>
+          </a:p>
+        </p:txBody>
       </p:sp>
       <p:pic>
         <p:nvPicPr>
-          <p:cNvPr id="17" name="Image 4" descr="C:/Users/neuma_p1qrsic/Repo/agentic-ops1/.scratch/deckgen/logos/cme.png">    </p:cNvPr>
+          <p:cNvPr id="17" name="Image 4" descr="C:/Users/neuma_p1qrsic/Repo/agentic-ops1/.scratch/deckgen/logos/cme.png"/>
           <p:cNvPicPr>
             <a:picLocks noChangeAspect="1"/>
           </p:cNvPicPr>
           <p:nvPr/>
         </p:nvPicPr>
         <p:blipFill>
-          <a:blip r:embed="rId5"/>
+          <a:blip r:embed="rId7"/>
           <a:stretch>
             <a:fillRect/>
           </a:stretch>
@@ -4852,6 +4875,13 @@
             <a:prstDash val="solid"/>
           </a:ln>
         </p:spPr>
+        <p:txBody>
+          <a:bodyPr/>
+          <a:lstStyle/>
+          <a:p>
+            <a:endParaRPr lang="en-US"/>
+          </a:p>
+        </p:txBody>
       </p:sp>
       <p:sp>
         <p:nvSpPr>
@@ -4879,17 +4909,24 @@
             <a:prstDash val="solid"/>
           </a:ln>
         </p:spPr>
+        <p:txBody>
+          <a:bodyPr/>
+          <a:lstStyle/>
+          <a:p>
+            <a:endParaRPr lang="en-US"/>
+          </a:p>
+        </p:txBody>
       </p:sp>
       <p:pic>
         <p:nvPicPr>
-          <p:cNvPr id="20" name="Image 5" descr="C:/Users/neuma_p1qrsic/Repo/agentic-ops1/.scratch/icons/merge.png">    </p:cNvPr>
+          <p:cNvPr id="20" name="Image 5" descr="C:/Users/neuma_p1qrsic/Repo/agentic-ops1/.scratch/icons/merge.png"/>
           <p:cNvPicPr>
             <a:picLocks noChangeAspect="1"/>
           </p:cNvPicPr>
           <p:nvPr/>
         </p:nvPicPr>
         <p:blipFill>
-          <a:blip r:embed="rId6"/>
+          <a:blip r:embed="rId8"/>
           <a:stretch>
             <a:fillRect/>
           </a:stretch>
@@ -4925,7 +4962,7 @@
           <a:bodyPr wrap="square" rtlCol="0" anchor="t"/>
           <a:lstStyle/>
           <a:p>
-            <a:pPr indent="0" marL="0">
+            <a:pPr marL="0" indent="0">
               <a:buNone/>
             </a:pPr>
             <a:r>
@@ -4964,7 +5001,7 @@
           <a:bodyPr wrap="square" rtlCol="0" anchor="t"/>
           <a:lstStyle/>
           <a:p>
-            <a:pPr indent="0" marL="0">
+            <a:pPr marL="0" indent="0">
               <a:lnSpc>
                 <a:spcPct val="120000"/>
               </a:lnSpc>
@@ -5011,6 +5048,13 @@
             <a:prstDash val="solid"/>
           </a:ln>
         </p:spPr>
+        <p:txBody>
+          <a:bodyPr/>
+          <a:lstStyle/>
+          <a:p>
+            <a:endParaRPr lang="en-US"/>
+          </a:p>
+        </p:txBody>
       </p:sp>
       <p:sp>
         <p:nvSpPr>
@@ -5038,17 +5082,24 @@
             <a:prstDash val="solid"/>
           </a:ln>
         </p:spPr>
+        <p:txBody>
+          <a:bodyPr/>
+          <a:lstStyle/>
+          <a:p>
+            <a:endParaRPr lang="en-US"/>
+          </a:p>
+        </p:txBody>
       </p:sp>
       <p:pic>
         <p:nvPicPr>
-          <p:cNvPr id="25" name="Image 6" descr="C:/Users/neuma_p1qrsic/Repo/agentic-ops1/.scratch/icons/spark.png">    </p:cNvPr>
+          <p:cNvPr id="25" name="Image 6" descr="C:/Users/neuma_p1qrsic/Repo/agentic-ops1/.scratch/icons/spark.png"/>
           <p:cNvPicPr>
             <a:picLocks noChangeAspect="1"/>
           </p:cNvPicPr>
           <p:nvPr/>
         </p:nvPicPr>
         <p:blipFill>
-          <a:blip r:embed="rId7"/>
+          <a:blip r:embed="rId9"/>
           <a:stretch>
             <a:fillRect/>
           </a:stretch>
@@ -5084,7 +5135,7 @@
           <a:bodyPr wrap="square" rtlCol="0" anchor="t"/>
           <a:lstStyle/>
           <a:p>
-            <a:pPr indent="0" marL="0">
+            <a:pPr marL="0" indent="0">
               <a:buNone/>
             </a:pPr>
             <a:r>
@@ -5123,7 +5174,7 @@
           <a:bodyPr wrap="square" rtlCol="0" anchor="t"/>
           <a:lstStyle/>
           <a:p>
-            <a:pPr indent="0" marL="0">
+            <a:pPr marL="0" indent="0">
               <a:lnSpc>
                 <a:spcPct val="120000"/>
               </a:lnSpc>
@@ -5165,7 +5216,7 @@
           <a:bodyPr wrap="square" rtlCol="0" anchor="ctr"/>
           <a:lstStyle/>
           <a:p>
-            <a:pPr algn="l" indent="0" marL="0">
+            <a:pPr marL="0" indent="0" algn="l">
               <a:buNone/>
             </a:pPr>
             <a:r>
@@ -5179,9 +5230,6 @@
               </a:rPr>
               <a:t>Brisken</a:t>
             </a:r>
-            <a:pPr algn="l" indent="0" marL="0">
-              <a:buNone/>
-            </a:pPr>
             <a:r>
               <a:rPr lang="en-US" sz="900" dirty="0">
                 <a:solidFill>
@@ -5218,7 +5266,7 @@
           <a:bodyPr wrap="square" rtlCol="0" anchor="ctr"/>
           <a:lstStyle/>
           <a:p>
-            <a:pPr algn="r" indent="0" marL="0">
+            <a:pPr marL="0" indent="0" algn="r">
               <a:buNone/>
             </a:pPr>
             <a:r>
@@ -5258,6 +5306,13 @@
             <a:prstDash val="solid"/>
           </a:ln>
         </p:spPr>
+        <p:txBody>
+          <a:bodyPr/>
+          <a:lstStyle/>
+          <a:p>
+            <a:endParaRPr lang="en-US"/>
+          </a:p>
+        </p:txBody>
       </p:sp>
     </p:spTree>
   </p:cSld>
@@ -5275,6 +5330,7 @@
         <a:solidFill>
           <a:srgbClr val="0B0E14"/>
         </a:solidFill>
+        <a:effectLst/>
       </p:bgPr>
     </p:bg>
     <p:spTree>
@@ -5315,6 +5371,13 @@
             <a:prstDash val="solid"/>
           </a:ln>
         </p:spPr>
+        <p:txBody>
+          <a:bodyPr/>
+          <a:lstStyle/>
+          <a:p>
+            <a:endParaRPr lang="en-US"/>
+          </a:p>
+        </p:txBody>
       </p:sp>
       <p:sp>
         <p:nvSpPr>
@@ -5337,11 +5400,11 @@
           <a:bodyPr wrap="square" rtlCol="0" anchor="ctr"/>
           <a:lstStyle/>
           <a:p>
-            <a:pPr algn="l" indent="0" marL="0">
+            <a:pPr marL="0" indent="0" algn="l">
               <a:buNone/>
             </a:pPr>
             <a:r>
-              <a:rPr lang="en-US" sz="1200" b="1" spc="200" kern="0" dirty="0">
+              <a:rPr lang="en-US" sz="1200" b="1" kern="0" spc="200" dirty="0">
                 <a:solidFill>
                   <a:srgbClr val="3BE3E0"/>
                 </a:solidFill>
@@ -5376,7 +5439,7 @@
           <a:bodyPr wrap="square" rtlCol="0" anchor="ctr"/>
           <a:lstStyle/>
           <a:p>
-            <a:pPr indent="0" marL="0">
+            <a:pPr marL="0" indent="0">
               <a:buNone/>
             </a:pPr>
             <a:r>
@@ -5420,6 +5483,13 @@
             <a:prstDash val="solid"/>
           </a:ln>
         </p:spPr>
+        <p:txBody>
+          <a:bodyPr/>
+          <a:lstStyle/>
+          <a:p>
+            <a:endParaRPr lang="en-US"/>
+          </a:p>
+        </p:txBody>
       </p:sp>
       <p:sp>
         <p:nvSpPr>
@@ -5447,17 +5517,24 @@
             <a:prstDash val="solid"/>
           </a:ln>
         </p:spPr>
+        <p:txBody>
+          <a:bodyPr/>
+          <a:lstStyle/>
+          <a:p>
+            <a:endParaRPr lang="en-US"/>
+          </a:p>
+        </p:txBody>
       </p:sp>
       <p:pic>
         <p:nvPicPr>
-          <p:cNvPr id="7" name="Image 0" descr="C:/Users/neuma_p1qrsic/Repo/agentic-ops1/.scratch/icons/venue.png">    </p:cNvPr>
+          <p:cNvPr id="7" name="Image 0" descr="C:/Users/neuma_p1qrsic/Repo/agentic-ops1/.scratch/icons/venue.png"/>
           <p:cNvPicPr>
             <a:picLocks noChangeAspect="1"/>
           </p:cNvPicPr>
           <p:nvPr/>
         </p:nvPicPr>
         <p:blipFill>
-          <a:blip r:embed="rId1"/>
+          <a:blip r:embed="rId3"/>
           <a:stretch>
             <a:fillRect/>
           </a:stretch>
@@ -5493,7 +5570,7 @@
           <a:bodyPr wrap="square" rtlCol="0" anchor="ctr"/>
           <a:lstStyle/>
           <a:p>
-            <a:pPr indent="0" marL="0">
+            <a:pPr marL="0" indent="0">
               <a:buNone/>
             </a:pPr>
             <a:r>
@@ -5532,7 +5609,7 @@
           <a:bodyPr wrap="square" rtlCol="0" anchor="ctr"/>
           <a:lstStyle/>
           <a:p>
-            <a:pPr indent="0" marL="0">
+            <a:pPr marL="0" indent="0">
               <a:lnSpc>
                 <a:spcPct val="125000"/>
               </a:lnSpc>
@@ -5552,7 +5629,7 @@
             <a:endParaRPr lang="en-US" sz="1300" dirty="0"/>
           </a:p>
           <a:p>
-            <a:pPr indent="0" marL="0">
+            <a:pPr marL="0" indent="0">
               <a:lnSpc>
                 <a:spcPct val="125000"/>
               </a:lnSpc>
@@ -5572,7 +5649,7 @@
             <a:endParaRPr lang="en-US" sz="1300" dirty="0"/>
           </a:p>
           <a:p>
-            <a:pPr indent="0" marL="0">
+            <a:pPr marL="0" indent="0">
               <a:lnSpc>
                 <a:spcPct val="125000"/>
               </a:lnSpc>
@@ -5619,17 +5696,24 @@
             <a:prstDash val="solid"/>
           </a:ln>
         </p:spPr>
+        <p:txBody>
+          <a:bodyPr/>
+          <a:lstStyle/>
+          <a:p>
+            <a:endParaRPr lang="en-US"/>
+          </a:p>
+        </p:txBody>
       </p:sp>
       <p:pic>
         <p:nvPicPr>
-          <p:cNvPr id="11" name="Image 1" descr="C:/Users/neuma_p1qrsic/Repo/agentic-ops1/.scratch/logo/favicon.png">    </p:cNvPr>
+          <p:cNvPr id="11" name="Image 1" descr="C:/Users/neuma_p1qrsic/Repo/agentic-ops1/.scratch/logo/favicon.png"/>
           <p:cNvPicPr>
             <a:picLocks noChangeAspect="1"/>
           </p:cNvPicPr>
           <p:nvPr/>
         </p:nvPicPr>
         <p:blipFill>
-          <a:blip r:embed="rId2"/>
+          <a:blip r:embed="rId4"/>
           <a:stretch>
             <a:fillRect/>
           </a:stretch>
@@ -5665,7 +5749,7 @@
           <a:bodyPr wrap="square" rtlCol="0" anchor="ctr"/>
           <a:lstStyle/>
           <a:p>
-            <a:pPr algn="ctr" indent="0" marL="0">
+            <a:pPr marL="0" indent="0" algn="ctr">
               <a:buNone/>
             </a:pPr>
             <a:r>
@@ -5704,7 +5788,7 @@
           <a:bodyPr wrap="square" rtlCol="0" anchor="ctr"/>
           <a:lstStyle/>
           <a:p>
-            <a:pPr algn="ctr" indent="0" marL="0">
+            <a:pPr marL="0" indent="0" algn="ctr">
               <a:buNone/>
             </a:pPr>
             <a:r>
@@ -5743,7 +5827,7 @@
           <a:bodyPr wrap="square" rtlCol="0" anchor="ctr"/>
           <a:lstStyle/>
           <a:p>
-            <a:pPr algn="ctr" indent="0" marL="0">
+            <a:pPr marL="0" indent="0" algn="ctr">
               <a:lnSpc>
                 <a:spcPct val="110000"/>
               </a:lnSpc>
@@ -5763,7 +5847,7 @@
             <a:endParaRPr lang="en-US" sz="1200" dirty="0"/>
           </a:p>
           <a:p>
-            <a:pPr algn="ctr" indent="0" marL="0">
+            <a:pPr marL="0" indent="0" algn="ctr">
               <a:lnSpc>
                 <a:spcPct val="110000"/>
               </a:lnSpc>
@@ -5810,6 +5894,13 @@
             <a:prstDash val="solid"/>
           </a:ln>
         </p:spPr>
+        <p:txBody>
+          <a:bodyPr/>
+          <a:lstStyle/>
+          <a:p>
+            <a:endParaRPr lang="en-US"/>
+          </a:p>
+        </p:txBody>
       </p:sp>
       <p:sp>
         <p:nvSpPr>
@@ -5837,17 +5928,24 @@
             <a:prstDash val="solid"/>
           </a:ln>
         </p:spPr>
+        <p:txBody>
+          <a:bodyPr/>
+          <a:lstStyle/>
+          <a:p>
+            <a:endParaRPr lang="en-US"/>
+          </a:p>
+        </p:txBody>
       </p:sp>
       <p:pic>
         <p:nvPicPr>
-          <p:cNvPr id="17" name="Image 2" descr="C:/Users/neuma_p1qrsic/Repo/agentic-ops1/.scratch/icons/database.png">    </p:cNvPr>
+          <p:cNvPr id="17" name="Image 2" descr="C:/Users/neuma_p1qrsic/Repo/agentic-ops1/.scratch/icons/database.png"/>
           <p:cNvPicPr>
             <a:picLocks noChangeAspect="1"/>
           </p:cNvPicPr>
           <p:nvPr/>
         </p:nvPicPr>
         <p:blipFill>
-          <a:blip r:embed="rId3"/>
+          <a:blip r:embed="rId5"/>
           <a:stretch>
             <a:fillRect/>
           </a:stretch>
@@ -5883,7 +5981,7 @@
           <a:bodyPr wrap="square" rtlCol="0" anchor="ctr"/>
           <a:lstStyle/>
           <a:p>
-            <a:pPr indent="0" marL="0">
+            <a:pPr marL="0" indent="0">
               <a:buNone/>
             </a:pPr>
             <a:r>
@@ -5922,7 +6020,7 @@
           <a:bodyPr wrap="square" rtlCol="0" anchor="ctr"/>
           <a:lstStyle/>
           <a:p>
-            <a:pPr indent="0" marL="0">
+            <a:pPr marL="0" indent="0">
               <a:lnSpc>
                 <a:spcPct val="125000"/>
               </a:lnSpc>
@@ -5942,7 +6040,7 @@
             <a:endParaRPr lang="en-US" sz="1300" dirty="0"/>
           </a:p>
           <a:p>
-            <a:pPr indent="0" marL="0">
+            <a:pPr marL="0" indent="0">
               <a:lnSpc>
                 <a:spcPct val="125000"/>
               </a:lnSpc>
@@ -5962,7 +6060,7 @@
             <a:endParaRPr lang="en-US" sz="1300" dirty="0"/>
           </a:p>
           <a:p>
-            <a:pPr indent="0" marL="0">
+            <a:pPr marL="0" indent="0">
               <a:lnSpc>
                 <a:spcPct val="125000"/>
               </a:lnSpc>
@@ -6007,6 +6105,13 @@
             <a:tailEnd type="triangle"/>
           </a:ln>
         </p:spPr>
+        <p:txBody>
+          <a:bodyPr/>
+          <a:lstStyle/>
+          <a:p>
+            <a:endParaRPr lang="en-US"/>
+          </a:p>
+        </p:txBody>
       </p:sp>
       <p:sp>
         <p:nvSpPr>
@@ -6032,6 +6137,13 @@
             <a:tailEnd type="triangle"/>
           </a:ln>
         </p:spPr>
+        <p:txBody>
+          <a:bodyPr/>
+          <a:lstStyle/>
+          <a:p>
+            <a:endParaRPr lang="en-US"/>
+          </a:p>
+        </p:txBody>
       </p:sp>
       <p:sp>
         <p:nvSpPr>
@@ -6059,17 +6171,24 @@
             <a:prstDash val="solid"/>
           </a:ln>
         </p:spPr>
+        <p:txBody>
+          <a:bodyPr/>
+          <a:lstStyle/>
+          <a:p>
+            <a:endParaRPr lang="en-US"/>
+          </a:p>
+        </p:txBody>
       </p:sp>
       <p:pic>
         <p:nvPicPr>
-          <p:cNvPr id="23" name="Image 3" descr="C:/Users/neuma_p1qrsic/Repo/agentic-ops1/.scratch/icons/shield.png">    </p:cNvPr>
+          <p:cNvPr id="23" name="Image 3" descr="C:/Users/neuma_p1qrsic/Repo/agentic-ops1/.scratch/icons/shield.png"/>
           <p:cNvPicPr>
             <a:picLocks noChangeAspect="1"/>
           </p:cNvPicPr>
           <p:nvPr/>
         </p:nvPicPr>
         <p:blipFill>
-          <a:blip r:embed="rId4"/>
+          <a:blip r:embed="rId6"/>
           <a:stretch>
             <a:fillRect/>
           </a:stretch>
@@ -6105,7 +6224,7 @@
           <a:bodyPr wrap="square" rtlCol="0" anchor="ctr"/>
           <a:lstStyle/>
           <a:p>
-            <a:pPr indent="0" marL="0">
+            <a:pPr marL="0" indent="0">
               <a:lnSpc>
                 <a:spcPct val="110000"/>
               </a:lnSpc>
@@ -6147,7 +6266,7 @@
           <a:bodyPr wrap="square" rtlCol="0" anchor="ctr"/>
           <a:lstStyle/>
           <a:p>
-            <a:pPr algn="l" indent="0" marL="0">
+            <a:pPr marL="0" indent="0" algn="l">
               <a:buNone/>
             </a:pPr>
             <a:r>
@@ -6161,9 +6280,6 @@
               </a:rPr>
               <a:t>Brisken</a:t>
             </a:r>
-            <a:pPr algn="l" indent="0" marL="0">
-              <a:buNone/>
-            </a:pPr>
             <a:r>
               <a:rPr lang="en-US" sz="900" dirty="0">
                 <a:solidFill>
@@ -6200,7 +6316,7 @@
           <a:bodyPr wrap="square" rtlCol="0" anchor="ctr"/>
           <a:lstStyle/>
           <a:p>
-            <a:pPr algn="r" indent="0" marL="0">
+            <a:pPr marL="0" indent="0" algn="r">
               <a:buNone/>
             </a:pPr>
             <a:r>
@@ -6240,6 +6356,13 @@
             <a:prstDash val="solid"/>
           </a:ln>
         </p:spPr>
+        <p:txBody>
+          <a:bodyPr/>
+          <a:lstStyle/>
+          <a:p>
+            <a:endParaRPr lang="en-US"/>
+          </a:p>
+        </p:txBody>
       </p:sp>
     </p:spTree>
   </p:cSld>
@@ -6257,6 +6380,7 @@
         <a:solidFill>
           <a:srgbClr val="0B0E14"/>
         </a:solidFill>
+        <a:effectLst/>
       </p:bgPr>
     </p:bg>
     <p:spTree>
@@ -6297,6 +6421,13 @@
             <a:prstDash val="solid"/>
           </a:ln>
         </p:spPr>
+        <p:txBody>
+          <a:bodyPr/>
+          <a:lstStyle/>
+          <a:p>
+            <a:endParaRPr lang="en-US"/>
+          </a:p>
+        </p:txBody>
       </p:sp>
       <p:sp>
         <p:nvSpPr>
@@ -6319,11 +6450,11 @@
           <a:bodyPr wrap="square" rtlCol="0" anchor="ctr"/>
           <a:lstStyle/>
           <a:p>
-            <a:pPr algn="l" indent="0" marL="0">
+            <a:pPr marL="0" indent="0" algn="l">
               <a:buNone/>
             </a:pPr>
             <a:r>
-              <a:rPr lang="en-US" sz="1200" b="1" spc="200" kern="0" dirty="0">
+              <a:rPr lang="en-US" sz="1200" b="1" kern="0" spc="200" dirty="0">
                 <a:solidFill>
                   <a:srgbClr val="3BE3E0"/>
                 </a:solidFill>
@@ -6358,7 +6489,7 @@
           <a:bodyPr wrap="square" rtlCol="0" anchor="ctr"/>
           <a:lstStyle/>
           <a:p>
-            <a:pPr indent="0" marL="0">
+            <a:pPr marL="0" indent="0">
               <a:buNone/>
             </a:pPr>
             <a:r>
@@ -6402,6 +6533,13 @@
             <a:prstDash val="solid"/>
           </a:ln>
         </p:spPr>
+        <p:txBody>
+          <a:bodyPr/>
+          <a:lstStyle/>
+          <a:p>
+            <a:endParaRPr lang="en-US"/>
+          </a:p>
+        </p:txBody>
       </p:sp>
       <p:sp>
         <p:nvSpPr>
@@ -6429,17 +6567,24 @@
             <a:prstDash val="solid"/>
           </a:ln>
         </p:spPr>
+        <p:txBody>
+          <a:bodyPr/>
+          <a:lstStyle/>
+          <a:p>
+            <a:endParaRPr lang="en-US"/>
+          </a:p>
+        </p:txBody>
       </p:sp>
       <p:pic>
         <p:nvPicPr>
-          <p:cNvPr id="7" name="Image 0" descr="C:/Users/neuma_p1qrsic/Repo/agentic-ops1/.scratch/icons/list.png">    </p:cNvPr>
+          <p:cNvPr id="7" name="Image 0" descr="C:/Users/neuma_p1qrsic/Repo/agentic-ops1/.scratch/icons/list.png"/>
           <p:cNvPicPr>
             <a:picLocks noChangeAspect="1"/>
           </p:cNvPicPr>
           <p:nvPr/>
         </p:nvPicPr>
         <p:blipFill>
-          <a:blip r:embed="rId1"/>
+          <a:blip r:embed="rId3"/>
           <a:stretch>
             <a:fillRect/>
           </a:stretch>
@@ -6475,7 +6620,7 @@
           <a:bodyPr wrap="square" rtlCol="0" anchor="ctr"/>
           <a:lstStyle/>
           <a:p>
-            <a:pPr indent="0" marL="0">
+            <a:pPr marL="0" indent="0">
               <a:buNone/>
             </a:pPr>
             <a:r>
@@ -6514,7 +6659,7 @@
           <a:bodyPr wrap="square" rtlCol="0" anchor="ctr"/>
           <a:lstStyle/>
           <a:p>
-            <a:pPr indent="0" marL="0">
+            <a:pPr marL="0" indent="0">
               <a:buNone/>
             </a:pPr>
             <a:r>
@@ -6558,6 +6703,13 @@
             <a:prstDash val="solid"/>
           </a:ln>
         </p:spPr>
+        <p:txBody>
+          <a:bodyPr/>
+          <a:lstStyle/>
+          <a:p>
+            <a:endParaRPr lang="en-US"/>
+          </a:p>
+        </p:txBody>
       </p:sp>
       <p:sp>
         <p:nvSpPr>
@@ -6585,17 +6737,24 @@
             <a:prstDash val="solid"/>
           </a:ln>
         </p:spPr>
+        <p:txBody>
+          <a:bodyPr/>
+          <a:lstStyle/>
+          <a:p>
+            <a:endParaRPr lang="en-US"/>
+          </a:p>
+        </p:txBody>
       </p:sp>
       <p:pic>
         <p:nvPicPr>
-          <p:cNvPr id="12" name="Image 1" descr="C:/Users/neuma_p1qrsic/Repo/agentic-ops1/.scratch/icons/shield.png">    </p:cNvPr>
+          <p:cNvPr id="12" name="Image 1" descr="C:/Users/neuma_p1qrsic/Repo/agentic-ops1/.scratch/icons/shield.png"/>
           <p:cNvPicPr>
             <a:picLocks noChangeAspect="1"/>
           </p:cNvPicPr>
           <p:nvPr/>
         </p:nvPicPr>
         <p:blipFill>
-          <a:blip r:embed="rId2"/>
+          <a:blip r:embed="rId4"/>
           <a:stretch>
             <a:fillRect/>
           </a:stretch>
@@ -6631,7 +6790,7 @@
           <a:bodyPr wrap="square" rtlCol="0" anchor="ctr"/>
           <a:lstStyle/>
           <a:p>
-            <a:pPr indent="0" marL="0">
+            <a:pPr marL="0" indent="0">
               <a:buNone/>
             </a:pPr>
             <a:r>
@@ -6670,7 +6829,7 @@
           <a:bodyPr wrap="square" rtlCol="0" anchor="ctr"/>
           <a:lstStyle/>
           <a:p>
-            <a:pPr indent="0" marL="0">
+            <a:pPr marL="0" indent="0">
               <a:buNone/>
             </a:pPr>
             <a:r>
@@ -6714,6 +6873,13 @@
             <a:prstDash val="solid"/>
           </a:ln>
         </p:spPr>
+        <p:txBody>
+          <a:bodyPr/>
+          <a:lstStyle/>
+          <a:p>
+            <a:endParaRPr lang="en-US"/>
+          </a:p>
+        </p:txBody>
       </p:sp>
       <p:sp>
         <p:nvSpPr>
@@ -6741,17 +6907,24 @@
             <a:prstDash val="solid"/>
           </a:ln>
         </p:spPr>
+        <p:txBody>
+          <a:bodyPr/>
+          <a:lstStyle/>
+          <a:p>
+            <a:endParaRPr lang="en-US"/>
+          </a:p>
+        </p:txBody>
       </p:sp>
       <p:pic>
         <p:nvPicPr>
-          <p:cNvPr id="17" name="Image 2" descr="C:/Users/neuma_p1qrsic/Repo/agentic-ops1/.scratch/icons/eye.png">    </p:cNvPr>
+          <p:cNvPr id="17" name="Image 2" descr="C:/Users/neuma_p1qrsic/Repo/agentic-ops1/.scratch/icons/eye.png"/>
           <p:cNvPicPr>
             <a:picLocks noChangeAspect="1"/>
           </p:cNvPicPr>
           <p:nvPr/>
         </p:nvPicPr>
         <p:blipFill>
-          <a:blip r:embed="rId3"/>
+          <a:blip r:embed="rId5"/>
           <a:stretch>
             <a:fillRect/>
           </a:stretch>
@@ -6787,7 +6960,7 @@
           <a:bodyPr wrap="square" rtlCol="0" anchor="ctr"/>
           <a:lstStyle/>
           <a:p>
-            <a:pPr indent="0" marL="0">
+            <a:pPr marL="0" indent="0">
               <a:buNone/>
             </a:pPr>
             <a:r>
@@ -6826,7 +6999,7 @@
           <a:bodyPr wrap="square" rtlCol="0" anchor="ctr"/>
           <a:lstStyle/>
           <a:p>
-            <a:pPr indent="0" marL="0">
+            <a:pPr marL="0" indent="0">
               <a:buNone/>
             </a:pPr>
             <a:r>
@@ -6870,6 +7043,13 @@
             <a:prstDash val="solid"/>
           </a:ln>
         </p:spPr>
+        <p:txBody>
+          <a:bodyPr/>
+          <a:lstStyle/>
+          <a:p>
+            <a:endParaRPr lang="en-US"/>
+          </a:p>
+        </p:txBody>
       </p:sp>
       <p:sp>
         <p:nvSpPr>
@@ -6897,17 +7077,24 @@
             <a:prstDash val="solid"/>
           </a:ln>
         </p:spPr>
+        <p:txBody>
+          <a:bodyPr/>
+          <a:lstStyle/>
+          <a:p>
+            <a:endParaRPr lang="en-US"/>
+          </a:p>
+        </p:txBody>
       </p:sp>
       <p:pic>
         <p:nvPicPr>
-          <p:cNvPr id="22" name="Image 3" descr="C:/Users/neuma_p1qrsic/Repo/agentic-ops1/.scratch/icons/bell.png">    </p:cNvPr>
+          <p:cNvPr id="22" name="Image 3" descr="C:/Users/neuma_p1qrsic/Repo/agentic-ops1/.scratch/icons/bell.png"/>
           <p:cNvPicPr>
             <a:picLocks noChangeAspect="1"/>
           </p:cNvPicPr>
           <p:nvPr/>
         </p:nvPicPr>
         <p:blipFill>
-          <a:blip r:embed="rId4"/>
+          <a:blip r:embed="rId6"/>
           <a:stretch>
             <a:fillRect/>
           </a:stretch>
@@ -6943,7 +7130,7 @@
           <a:bodyPr wrap="square" rtlCol="0" anchor="ctr"/>
           <a:lstStyle/>
           <a:p>
-            <a:pPr indent="0" marL="0">
+            <a:pPr marL="0" indent="0">
               <a:buNone/>
             </a:pPr>
             <a:r>
@@ -6982,7 +7169,7 @@
           <a:bodyPr wrap="square" rtlCol="0" anchor="ctr"/>
           <a:lstStyle/>
           <a:p>
-            <a:pPr indent="0" marL="0">
+            <a:pPr marL="0" indent="0">
               <a:buNone/>
             </a:pPr>
             <a:r>
@@ -7026,6 +7213,13 @@
             <a:prstDash val="solid"/>
           </a:ln>
         </p:spPr>
+        <p:txBody>
+          <a:bodyPr/>
+          <a:lstStyle/>
+          <a:p>
+            <a:endParaRPr lang="en-US"/>
+          </a:p>
+        </p:txBody>
       </p:sp>
       <p:sp>
         <p:nvSpPr>
@@ -7053,17 +7247,24 @@
             <a:prstDash val="solid"/>
           </a:ln>
         </p:spPr>
+        <p:txBody>
+          <a:bodyPr/>
+          <a:lstStyle/>
+          <a:p>
+            <a:endParaRPr lang="en-US"/>
+          </a:p>
+        </p:txBody>
       </p:sp>
       <p:pic>
         <p:nvPicPr>
-          <p:cNvPr id="27" name="Image 4" descr="C:/Users/neuma_p1qrsic/Repo/agentic-ops1/.scratch/icons/blocks.png">    </p:cNvPr>
+          <p:cNvPr id="27" name="Image 4" descr="C:/Users/neuma_p1qrsic/Repo/agentic-ops1/.scratch/icons/blocks.png"/>
           <p:cNvPicPr>
             <a:picLocks noChangeAspect="1"/>
           </p:cNvPicPr>
           <p:nvPr/>
         </p:nvPicPr>
         <p:blipFill>
-          <a:blip r:embed="rId5"/>
+          <a:blip r:embed="rId7"/>
           <a:stretch>
             <a:fillRect/>
           </a:stretch>
@@ -7099,7 +7300,7 @@
           <a:bodyPr wrap="square" rtlCol="0" anchor="ctr"/>
           <a:lstStyle/>
           <a:p>
-            <a:pPr indent="0" marL="0">
+            <a:pPr marL="0" indent="0">
               <a:buNone/>
             </a:pPr>
             <a:r>
@@ -7138,7 +7339,7 @@
           <a:bodyPr wrap="square" rtlCol="0" anchor="ctr"/>
           <a:lstStyle/>
           <a:p>
-            <a:pPr indent="0" marL="0">
+            <a:pPr marL="0" indent="0">
               <a:buNone/>
             </a:pPr>
             <a:r>
@@ -7182,6 +7383,13 @@
             <a:prstDash val="solid"/>
           </a:ln>
         </p:spPr>
+        <p:txBody>
+          <a:bodyPr/>
+          <a:lstStyle/>
+          <a:p>
+            <a:endParaRPr lang="en-US"/>
+          </a:p>
+        </p:txBody>
       </p:sp>
       <p:sp>
         <p:nvSpPr>
@@ -7209,17 +7417,24 @@
             <a:prstDash val="solid"/>
           </a:ln>
         </p:spPr>
+        <p:txBody>
+          <a:bodyPr/>
+          <a:lstStyle/>
+          <a:p>
+            <a:endParaRPr lang="en-US"/>
+          </a:p>
+        </p:txBody>
       </p:sp>
       <p:pic>
         <p:nvPicPr>
-          <p:cNvPr id="32" name="Image 5" descr="C:/Users/neuma_p1qrsic/Repo/agentic-ops1/.scratch/icons/lock.png">    </p:cNvPr>
+          <p:cNvPr id="32" name="Image 5" descr="C:/Users/neuma_p1qrsic/Repo/agentic-ops1/.scratch/icons/lock.png"/>
           <p:cNvPicPr>
             <a:picLocks noChangeAspect="1"/>
           </p:cNvPicPr>
           <p:nvPr/>
         </p:nvPicPr>
         <p:blipFill>
-          <a:blip r:embed="rId6"/>
+          <a:blip r:embed="rId8"/>
           <a:stretch>
             <a:fillRect/>
           </a:stretch>
@@ -7255,7 +7470,7 @@
           <a:bodyPr wrap="square" rtlCol="0" anchor="ctr"/>
           <a:lstStyle/>
           <a:p>
-            <a:pPr indent="0" marL="0">
+            <a:pPr marL="0" indent="0">
               <a:buNone/>
             </a:pPr>
             <a:r>
@@ -7294,7 +7509,7 @@
           <a:bodyPr wrap="square" rtlCol="0" anchor="ctr"/>
           <a:lstStyle/>
           <a:p>
-            <a:pPr indent="0" marL="0">
+            <a:pPr marL="0" indent="0">
               <a:buNone/>
             </a:pPr>
             <a:r>
@@ -7333,7 +7548,7 @@
           <a:bodyPr wrap="square" rtlCol="0" anchor="ctr"/>
           <a:lstStyle/>
           <a:p>
-            <a:pPr algn="l" indent="0" marL="0">
+            <a:pPr marL="0" indent="0" algn="l">
               <a:buNone/>
             </a:pPr>
             <a:r>
@@ -7347,9 +7562,6 @@
               </a:rPr>
               <a:t>Brisken</a:t>
             </a:r>
-            <a:pPr algn="l" indent="0" marL="0">
-              <a:buNone/>
-            </a:pPr>
             <a:r>
               <a:rPr lang="en-US" sz="900" dirty="0">
                 <a:solidFill>
@@ -7386,7 +7598,7 @@
           <a:bodyPr wrap="square" rtlCol="0" anchor="ctr"/>
           <a:lstStyle/>
           <a:p>
-            <a:pPr algn="r" indent="0" marL="0">
+            <a:pPr marL="0" indent="0" algn="r">
               <a:buNone/>
             </a:pPr>
             <a:r>
@@ -7426,6 +7638,13 @@
             <a:prstDash val="solid"/>
           </a:ln>
         </p:spPr>
+        <p:txBody>
+          <a:bodyPr/>
+          <a:lstStyle/>
+          <a:p>
+            <a:endParaRPr lang="en-US"/>
+          </a:p>
+        </p:txBody>
       </p:sp>
     </p:spTree>
   </p:cSld>
@@ -7443,6 +7662,7 @@
         <a:solidFill>
           <a:srgbClr val="0E121B"/>
         </a:solidFill>
+        <a:effectLst/>
       </p:bgPr>
     </p:bg>
     <p:spTree>
@@ -7483,6 +7703,13 @@
             <a:prstDash val="solid"/>
           </a:ln>
         </p:spPr>
+        <p:txBody>
+          <a:bodyPr/>
+          <a:lstStyle/>
+          <a:p>
+            <a:endParaRPr lang="en-US"/>
+          </a:p>
+        </p:txBody>
       </p:sp>
       <p:sp>
         <p:nvSpPr>
@@ -7505,11 +7732,11 @@
           <a:bodyPr wrap="square" rtlCol="0" anchor="ctr"/>
           <a:lstStyle/>
           <a:p>
-            <a:pPr algn="l" indent="0" marL="0">
+            <a:pPr marL="0" indent="0" algn="l">
               <a:buNone/>
             </a:pPr>
             <a:r>
-              <a:rPr lang="en-US" sz="1200" b="1" spc="200" kern="0" dirty="0">
+              <a:rPr lang="en-US" sz="1200" b="1" kern="0" spc="200" dirty="0">
                 <a:solidFill>
                   <a:srgbClr val="3BE3E0"/>
                 </a:solidFill>
@@ -7544,7 +7771,7 @@
           <a:bodyPr wrap="square" rtlCol="0" anchor="ctr"/>
           <a:lstStyle/>
           <a:p>
-            <a:pPr indent="0" marL="0">
+            <a:pPr marL="0" indent="0">
               <a:buNone/>
             </a:pPr>
             <a:r>
@@ -7558,9 +7785,6 @@
               </a:rPr>
               <a:t>TreasuryCentral is powered by </a:t>
             </a:r>
-            <a:pPr indent="0" marL="0">
-              <a:buNone/>
-            </a:pPr>
             <a:r>
               <a:rPr lang="en-US" sz="2900" b="1" dirty="0">
                 <a:solidFill>
@@ -7572,9 +7796,6 @@
               </a:rPr>
               <a:t>OnePilot</a:t>
             </a:r>
-            <a:pPr indent="0" marL="0">
-              <a:buNone/>
-            </a:pPr>
             <a:r>
               <a:rPr lang="en-US" sz="2900" b="1" dirty="0">
                 <a:solidFill>
@@ -7611,7 +7832,7 @@
           <a:bodyPr wrap="square" rtlCol="0" anchor="ctr"/>
           <a:lstStyle/>
           <a:p>
-            <a:pPr indent="0" marL="0">
+            <a:pPr marL="0" indent="0">
               <a:lnSpc>
                 <a:spcPct val="130000"/>
               </a:lnSpc>
@@ -7658,17 +7879,24 @@
             <a:prstDash val="solid"/>
           </a:ln>
         </p:spPr>
+        <p:txBody>
+          <a:bodyPr/>
+          <a:lstStyle/>
+          <a:p>
+            <a:endParaRPr lang="en-US"/>
+          </a:p>
+        </p:txBody>
       </p:sp>
       <p:pic>
         <p:nvPicPr>
-          <p:cNvPr id="7" name="Image 0" descr="C:/Users/neuma_p1qrsic/Repo/agentic-ops1/.scratch/icons/database.png">    </p:cNvPr>
+          <p:cNvPr id="7" name="Image 0" descr="C:/Users/neuma_p1qrsic/Repo/agentic-ops1/.scratch/icons/database.png"/>
           <p:cNvPicPr>
             <a:picLocks noChangeAspect="1"/>
           </p:cNvPicPr>
           <p:nvPr/>
         </p:nvPicPr>
         <p:blipFill>
-          <a:blip r:embed="rId1"/>
+          <a:blip r:embed="rId3"/>
           <a:stretch>
             <a:fillRect/>
           </a:stretch>
@@ -7704,7 +7932,7 @@
           <a:bodyPr wrap="square" rtlCol="0" anchor="ctr"/>
           <a:lstStyle/>
           <a:p>
-            <a:pPr algn="ctr" indent="0" marL="0">
+            <a:pPr marL="0" indent="0" algn="ctr">
               <a:buNone/>
             </a:pPr>
             <a:r>
@@ -7748,17 +7976,24 @@
             <a:prstDash val="solid"/>
           </a:ln>
         </p:spPr>
+        <p:txBody>
+          <a:bodyPr/>
+          <a:lstStyle/>
+          <a:p>
+            <a:endParaRPr lang="en-US"/>
+          </a:p>
+        </p:txBody>
       </p:sp>
       <p:pic>
         <p:nvPicPr>
-          <p:cNvPr id="10" name="Image 1" descr="C:/Users/neuma_p1qrsic/Repo/agentic-ops1/.scratch/icons/sheet.png">    </p:cNvPr>
+          <p:cNvPr id="10" name="Image 1" descr="C:/Users/neuma_p1qrsic/Repo/agentic-ops1/.scratch/icons/sheet.png"/>
           <p:cNvPicPr>
             <a:picLocks noChangeAspect="1"/>
           </p:cNvPicPr>
           <p:nvPr/>
         </p:nvPicPr>
         <p:blipFill>
-          <a:blip r:embed="rId2"/>
+          <a:blip r:embed="rId4"/>
           <a:stretch>
             <a:fillRect/>
           </a:stretch>
@@ -7794,7 +8029,7 @@
           <a:bodyPr wrap="square" rtlCol="0" anchor="ctr"/>
           <a:lstStyle/>
           <a:p>
-            <a:pPr algn="ctr" indent="0" marL="0">
+            <a:pPr marL="0" indent="0" algn="ctr">
               <a:buNone/>
             </a:pPr>
             <a:r>
@@ -7838,17 +8073,24 @@
             <a:prstDash val="solid"/>
           </a:ln>
         </p:spPr>
+        <p:txBody>
+          <a:bodyPr/>
+          <a:lstStyle/>
+          <a:p>
+            <a:endParaRPr lang="en-US"/>
+          </a:p>
+        </p:txBody>
       </p:sp>
       <p:pic>
         <p:nvPicPr>
-          <p:cNvPr id="13" name="Image 2" descr="C:/Users/neuma_p1qrsic/Repo/agentic-ops1/.scratch/icons/mail.png">    </p:cNvPr>
+          <p:cNvPr id="13" name="Image 2" descr="C:/Users/neuma_p1qrsic/Repo/agentic-ops1/.scratch/icons/mail.png"/>
           <p:cNvPicPr>
             <a:picLocks noChangeAspect="1"/>
           </p:cNvPicPr>
           <p:nvPr/>
         </p:nvPicPr>
         <p:blipFill>
-          <a:blip r:embed="rId3"/>
+          <a:blip r:embed="rId5"/>
           <a:stretch>
             <a:fillRect/>
           </a:stretch>
@@ -7884,7 +8126,7 @@
           <a:bodyPr wrap="square" rtlCol="0" anchor="ctr"/>
           <a:lstStyle/>
           <a:p>
-            <a:pPr algn="ctr" indent="0" marL="0">
+            <a:pPr marL="0" indent="0" algn="ctr">
               <a:buNone/>
             </a:pPr>
             <a:r>
@@ -7928,17 +8170,24 @@
             <a:prstDash val="solid"/>
           </a:ln>
         </p:spPr>
+        <p:txBody>
+          <a:bodyPr/>
+          <a:lstStyle/>
+          <a:p>
+            <a:endParaRPr lang="en-US"/>
+          </a:p>
+        </p:txBody>
       </p:sp>
       <p:pic>
         <p:nvPicPr>
-          <p:cNvPr id="16" name="Image 3" descr="C:/Users/neuma_p1qrsic/Repo/agentic-ops1/.scratch/icons/globe.png">    </p:cNvPr>
+          <p:cNvPr id="16" name="Image 3" descr="C:/Users/neuma_p1qrsic/Repo/agentic-ops1/.scratch/icons/globe.png"/>
           <p:cNvPicPr>
             <a:picLocks noChangeAspect="1"/>
           </p:cNvPicPr>
           <p:nvPr/>
         </p:nvPicPr>
         <p:blipFill>
-          <a:blip r:embed="rId4"/>
+          <a:blip r:embed="rId6"/>
           <a:stretch>
             <a:fillRect/>
           </a:stretch>
@@ -7974,7 +8223,7 @@
           <a:bodyPr wrap="square" rtlCol="0" anchor="ctr"/>
           <a:lstStyle/>
           <a:p>
-            <a:pPr algn="ctr" indent="0" marL="0">
+            <a:pPr marL="0" indent="0" algn="ctr">
               <a:buNone/>
             </a:pPr>
             <a:r>
@@ -8018,17 +8267,24 @@
             <a:prstDash val="solid"/>
           </a:ln>
         </p:spPr>
+        <p:txBody>
+          <a:bodyPr/>
+          <a:lstStyle/>
+          <a:p>
+            <a:endParaRPr lang="en-US"/>
+          </a:p>
+        </p:txBody>
       </p:sp>
       <p:pic>
         <p:nvPicPr>
-          <p:cNvPr id="19" name="Image 4" descr="C:/Users/neuma_p1qrsic/Repo/agentic-ops1/.scratch/icons/spark.png">    </p:cNvPr>
+          <p:cNvPr id="19" name="Image 4" descr="C:/Users/neuma_p1qrsic/Repo/agentic-ops1/.scratch/icons/spark.png"/>
           <p:cNvPicPr>
             <a:picLocks noChangeAspect="1"/>
           </p:cNvPicPr>
           <p:nvPr/>
         </p:nvPicPr>
         <p:blipFill>
-          <a:blip r:embed="rId5"/>
+          <a:blip r:embed="rId7"/>
           <a:stretch>
             <a:fillRect/>
           </a:stretch>
@@ -8064,7 +8320,7 @@
           <a:bodyPr wrap="square" rtlCol="0" anchor="ctr"/>
           <a:lstStyle/>
           <a:p>
-            <a:pPr algn="ctr" indent="0" marL="0">
+            <a:pPr marL="0" indent="0" algn="ctr">
               <a:buNone/>
             </a:pPr>
             <a:r>
@@ -8103,7 +8359,7 @@
           <a:bodyPr wrap="square" rtlCol="0" anchor="ctr"/>
           <a:lstStyle/>
           <a:p>
-            <a:pPr indent="0" marL="0">
+            <a:pPr marL="0" indent="0">
               <a:buNone/>
             </a:pPr>
             <a:r>
@@ -8117,9 +8373,6 @@
               </a:rPr>
               <a:t>Live in weeks, not a rebuild. </a:t>
             </a:r>
-            <a:pPr indent="0" marL="0">
-              <a:buNone/>
-            </a:pPr>
             <a:r>
               <a:rPr lang="en-US" sz="1500" dirty="0">
                 <a:solidFill>
@@ -8156,7 +8409,7 @@
           <a:bodyPr wrap="square" rtlCol="0" anchor="ctr"/>
           <a:lstStyle/>
           <a:p>
-            <a:pPr algn="l" indent="0" marL="0">
+            <a:pPr marL="0" indent="0" algn="l">
               <a:buNone/>
             </a:pPr>
             <a:r>
@@ -8170,9 +8423,6 @@
               </a:rPr>
               <a:t>Brisken</a:t>
             </a:r>
-            <a:pPr algn="l" indent="0" marL="0">
-              <a:buNone/>
-            </a:pPr>
             <a:r>
               <a:rPr lang="en-US" sz="900" dirty="0">
                 <a:solidFill>
@@ -8209,7 +8459,7 @@
           <a:bodyPr wrap="square" rtlCol="0" anchor="ctr"/>
           <a:lstStyle/>
           <a:p>
-            <a:pPr algn="r" indent="0" marL="0">
+            <a:pPr marL="0" indent="0" algn="r">
               <a:buNone/>
             </a:pPr>
             <a:r>
@@ -8249,6 +8499,13 @@
             <a:prstDash val="solid"/>
           </a:ln>
         </p:spPr>
+        <p:txBody>
+          <a:bodyPr/>
+          <a:lstStyle/>
+          <a:p>
+            <a:endParaRPr lang="en-US"/>
+          </a:p>
+        </p:txBody>
       </p:sp>
     </p:spTree>
   </p:cSld>
@@ -8266,6 +8523,7 @@
         <a:solidFill>
           <a:srgbClr val="0B0E14"/>
         </a:solidFill>
+        <a:effectLst/>
       </p:bgPr>
     </p:bg>
     <p:spTree>
@@ -8284,14 +8542,14 @@
       </p:grpSpPr>
       <p:pic>
         <p:nvPicPr>
-          <p:cNvPr id="2" name="Image 0" descr="C:/Users/neuma_p1qrsic/Repo/agentic-ops1/.scratch/logo/favicon.png">    </p:cNvPr>
+          <p:cNvPr id="2" name="Image 0" descr="C:/Users/neuma_p1qrsic/Repo/agentic-ops1/.scratch/logo/favicon.png"/>
           <p:cNvPicPr>
             <a:picLocks noChangeAspect="1"/>
           </p:cNvPicPr>
           <p:nvPr/>
         </p:nvPicPr>
         <p:blipFill>
-          <a:blip r:embed="rId1"/>
+          <a:blip r:embed="rId3"/>
           <a:stretch>
             <a:fillRect/>
           </a:stretch>
@@ -8330,6 +8588,13 @@
             <a:prstDash val="solid"/>
           </a:ln>
         </p:spPr>
+        <p:txBody>
+          <a:bodyPr/>
+          <a:lstStyle/>
+          <a:p>
+            <a:endParaRPr lang="en-US"/>
+          </a:p>
+        </p:txBody>
       </p:sp>
       <p:sp>
         <p:nvSpPr>
@@ -8352,11 +8617,11 @@
           <a:bodyPr wrap="square" rtlCol="0" anchor="ctr"/>
           <a:lstStyle/>
           <a:p>
-            <a:pPr algn="l" indent="0" marL="0">
+            <a:pPr marL="0" indent="0" algn="l">
               <a:buNone/>
             </a:pPr>
             <a:r>
-              <a:rPr lang="en-US" sz="1200" b="1" spc="200" kern="0" dirty="0">
+              <a:rPr lang="en-US" sz="1200" b="1" kern="0" spc="200" dirty="0">
                 <a:solidFill>
                   <a:srgbClr val="3BE3E0"/>
                 </a:solidFill>
@@ -8391,7 +8656,7 @@
           <a:bodyPr wrap="square" rtlCol="0" anchor="ctr"/>
           <a:lstStyle/>
           <a:p>
-            <a:pPr indent="0" marL="0">
+            <a:pPr marL="0" indent="0">
               <a:buNone/>
             </a:pPr>
             <a:r>
@@ -8430,7 +8695,7 @@
           <a:bodyPr wrap="square" rtlCol="0" anchor="ctr"/>
           <a:lstStyle/>
           <a:p>
-            <a:pPr indent="0" marL="0">
+            <a:pPr marL="0" indent="0">
               <a:lnSpc>
                 <a:spcPct val="128000"/>
               </a:lnSpc>
@@ -8445,7 +8710,29 @@
                 <a:ea typeface="Segoe UI" pitchFamily="34" charset="-122"/>
                 <a:cs typeface="Segoe UI" pitchFamily="34" charset="-120"/>
               </a:rPr>
-              <a:t>Teams like Evonik and RWZ build on OnePilot directly, SAP and non-SAP, on-prem included, and move at the speed of their own ideas rather than a vendor roadmap.</a:t>
+              <a:t>Customer teams build on OnePilot directly, SAP and non-SAP, on-prem included, and move at the speed of their own ideas rather than a vendor roadmap.</a:t>
+            </a:r>
+            <a:r>
+              <a:rPr lang="en-US" sz="1600">
+                <a:solidFill>
+                  <a:srgbClr val="AAB6C7"/>
+                </a:solidFill>
+                <a:latin typeface="Segoe UI" pitchFamily="34" charset="0"/>
+                <a:ea typeface="Segoe UI" pitchFamily="34" charset="-122"/>
+                <a:cs typeface="Segoe UI" pitchFamily="34" charset="-120"/>
+              </a:rPr>
+              <a:t/>
+            </a:r>
+            <a:r>
+              <a:rPr lang="en-US" sz="1600" dirty="0">
+                <a:solidFill>
+                  <a:srgbClr val="AAB6C7"/>
+                </a:solidFill>
+                <a:latin typeface="Segoe UI" pitchFamily="34" charset="0"/>
+                <a:ea typeface="Segoe UI" pitchFamily="34" charset="-122"/>
+                <a:cs typeface="Segoe UI" pitchFamily="34" charset="-120"/>
+              </a:rPr>
+              <a:t/>
             </a:r>
             <a:endParaRPr lang="en-US" sz="1600" dirty="0"/>
           </a:p>
@@ -8477,17 +8764,24 @@
             <a:prstDash val="solid"/>
           </a:ln>
         </p:spPr>
+        <p:txBody>
+          <a:bodyPr/>
+          <a:lstStyle/>
+          <a:p>
+            <a:endParaRPr lang="en-US"/>
+          </a:p>
+        </p:txBody>
       </p:sp>
       <p:pic>
         <p:nvPicPr>
-          <p:cNvPr id="8" name="Image 1" descr="C:/Users/neuma_p1qrsic/Repo/agentic-ops1/.scratch/icons/target.png">    </p:cNvPr>
+          <p:cNvPr id="8" name="Image 1" descr="C:/Users/neuma_p1qrsic/Repo/agentic-ops1/.scratch/icons/target.png"/>
           <p:cNvPicPr>
             <a:picLocks noChangeAspect="1"/>
           </p:cNvPicPr>
           <p:nvPr/>
         </p:nvPicPr>
         <p:blipFill>
-          <a:blip r:embed="rId2"/>
+          <a:blip r:embed="rId4"/>
           <a:stretch>
             <a:fillRect/>
           </a:stretch>
@@ -8523,7 +8817,7 @@
           <a:bodyPr wrap="square" rtlCol="0" anchor="ctr"/>
           <a:lstStyle/>
           <a:p>
-            <a:pPr indent="0" marL="0">
+            <a:pPr marL="0" indent="0">
               <a:lnSpc>
                 <a:spcPct val="118000"/>
               </a:lnSpc>
@@ -8570,17 +8864,24 @@
             <a:prstDash val="solid"/>
           </a:ln>
         </p:spPr>
+        <p:txBody>
+          <a:bodyPr/>
+          <a:lstStyle/>
+          <a:p>
+            <a:endParaRPr lang="en-US"/>
+          </a:p>
+        </p:txBody>
       </p:sp>
       <p:pic>
         <p:nvPicPr>
-          <p:cNvPr id="11" name="Image 2" descr="C:/Users/neuma_p1qrsic/Repo/agentic-ops1/.scratch/deckgen/logos/sap.png">    </p:cNvPr>
+          <p:cNvPr id="11" name="Image 2" descr="C:/Users/neuma_p1qrsic/Repo/agentic-ops1/.scratch/deckgen/logos/sap.png"/>
           <p:cNvPicPr>
             <a:picLocks noChangeAspect="1"/>
           </p:cNvPicPr>
           <p:nvPr/>
         </p:nvPicPr>
         <p:blipFill>
-          <a:blip r:embed="rId3"/>
+          <a:blip r:embed="rId5"/>
           <a:stretch>
             <a:fillRect/>
           </a:stretch>
@@ -8597,23 +8898,150 @@
       </p:pic>
       <p:sp>
         <p:nvSpPr>
-          <p:cNvPr id="12" name="Shape 7"/>
-          <p:cNvSpPr/>
-          <p:nvPr/>
-        </p:nvSpPr>
-        <p:spPr>
-          <a:xfrm>
-            <a:off x="2304288" y="4754880"/>
-            <a:ext cx="1554480" cy="658368"/>
-          </a:xfrm>
-          <a:prstGeom prst="roundRect">
-            <a:avLst>
-              <a:gd name="adj" fmla="val 19444"/>
-            </a:avLst>
-          </a:prstGeom>
-          <a:solidFill>
-            <a:srgbClr val="FFFFFF"/>
-          </a:solidFill>
+          <p:cNvPr id="14" name="Text 8"/>
+          <p:cNvSpPr/>
+          <p:nvPr/>
+        </p:nvSpPr>
+        <p:spPr>
+          <a:xfrm>
+            <a:off x="4178808" y="4754880"/>
+            <a:ext cx="7445959" cy="658368"/>
+          </a:xfrm>
+          <a:prstGeom prst="rect">
+            <a:avLst/>
+          </a:prstGeom>
+          <a:noFill/>
+          <a:ln/>
+        </p:spPr>
+        <p:txBody>
+          <a:bodyPr wrap="square" rtlCol="0" anchor="ctr"/>
+          <a:lstStyle/>
+          <a:p>
+            <a:pPr marL="0" indent="0">
+              <a:lnSpc>
+                <a:spcPct val="112000"/>
+              </a:lnSpc>
+              <a:buNone/>
+            </a:pPr>
+            <a:r>
+              <a:rPr lang="en-US" sz="1300" dirty="0">
+                <a:solidFill>
+                  <a:srgbClr val="AAB6C7"/>
+                </a:solidFill>
+                <a:latin typeface="Segoe UI" pitchFamily="34" charset="0"/>
+                <a:ea typeface="Segoe UI" pitchFamily="34" charset="-122"/>
+                <a:cs typeface="Segoe UI" pitchFamily="34" charset="-120"/>
+              </a:rPr>
+              <a:t>An SAP co-innovation partner. The cockpit runs on SAP's own cloud, so it sits inside your landscape.</a:t>
+            </a:r>
+            <a:endParaRPr lang="en-US" sz="1300" dirty="0"/>
+          </a:p>
+        </p:txBody>
+      </p:sp>
+      <p:sp>
+        <p:nvSpPr>
+          <p:cNvPr id="15" name="Text 9"/>
+          <p:cNvSpPr/>
+          <p:nvPr/>
+        </p:nvSpPr>
+        <p:spPr>
+          <a:xfrm>
+            <a:off x="566928" y="6400800"/>
+            <a:ext cx="8229600" cy="274320"/>
+          </a:xfrm>
+          <a:prstGeom prst="rect">
+            <a:avLst/>
+          </a:prstGeom>
+          <a:noFill/>
+          <a:ln/>
+        </p:spPr>
+        <p:txBody>
+          <a:bodyPr wrap="square" rtlCol="0" anchor="ctr"/>
+          <a:lstStyle/>
+          <a:p>
+            <a:pPr marL="0" indent="0" algn="l">
+              <a:buNone/>
+            </a:pPr>
+            <a:r>
+              <a:rPr lang="en-US" sz="900" b="1" dirty="0">
+                <a:solidFill>
+                  <a:srgbClr val="AAB6C7"/>
+                </a:solidFill>
+                <a:latin typeface="Segoe UI" pitchFamily="34" charset="0"/>
+                <a:ea typeface="Segoe UI" pitchFamily="34" charset="-122"/>
+                <a:cs typeface="Segoe UI" pitchFamily="34" charset="-120"/>
+              </a:rPr>
+              <a:t>Brisken</a:t>
+            </a:r>
+            <a:r>
+              <a:rPr lang="en-US" sz="900" dirty="0">
+                <a:solidFill>
+                  <a:srgbClr val="7C8A9B"/>
+                </a:solidFill>
+                <a:latin typeface="Segoe UI" pitchFamily="34" charset="0"/>
+                <a:ea typeface="Segoe UI" pitchFamily="34" charset="-122"/>
+                <a:cs typeface="Segoe UI" pitchFamily="34" charset="-120"/>
+              </a:rPr>
+              <a:t>   TreasuryCentral, powered by OnePilot</a:t>
+            </a:r>
+            <a:endParaRPr lang="en-US" sz="900" dirty="0"/>
+          </a:p>
+        </p:txBody>
+      </p:sp>
+      <p:sp>
+        <p:nvSpPr>
+          <p:cNvPr id="16" name="Text 10"/>
+          <p:cNvSpPr/>
+          <p:nvPr/>
+        </p:nvSpPr>
+        <p:spPr>
+          <a:xfrm>
+            <a:off x="10527487" y="6400800"/>
+            <a:ext cx="1097280" cy="274320"/>
+          </a:xfrm>
+          <a:prstGeom prst="rect">
+            <a:avLst/>
+          </a:prstGeom>
+          <a:noFill/>
+          <a:ln/>
+        </p:spPr>
+        <p:txBody>
+          <a:bodyPr wrap="square" rtlCol="0" anchor="ctr"/>
+          <a:lstStyle/>
+          <a:p>
+            <a:pPr marL="0" indent="0" algn="r">
+              <a:buNone/>
+            </a:pPr>
+            <a:r>
+              <a:rPr lang="en-US" sz="900" dirty="0">
+                <a:solidFill>
+                  <a:srgbClr val="AAB6C7"/>
+                </a:solidFill>
+                <a:latin typeface="Segoe UI" pitchFamily="34" charset="0"/>
+                <a:ea typeface="Segoe UI" pitchFamily="34" charset="-122"/>
+                <a:cs typeface="Segoe UI" pitchFamily="34" charset="-120"/>
+              </a:rPr>
+              <a:t>08 / 10</a:t>
+            </a:r>
+            <a:endParaRPr lang="en-US" sz="900" dirty="0"/>
+          </a:p>
+        </p:txBody>
+      </p:sp>
+      <p:sp>
+        <p:nvSpPr>
+          <p:cNvPr id="17" name="Shape 11"/>
+          <p:cNvSpPr/>
+          <p:nvPr/>
+        </p:nvSpPr>
+        <p:spPr>
+          <a:xfrm>
+            <a:off x="566928" y="6327648"/>
+            <a:ext cx="11057839" cy="0"/>
+          </a:xfrm>
+          <a:prstGeom prst="line">
+            <a:avLst/>
+          </a:prstGeom>
+          <a:noFill/>
           <a:ln w="9525">
             <a:solidFill>
               <a:srgbClr val="36414F"/>
@@ -8621,187 +9049,13 @@
             <a:prstDash val="solid"/>
           </a:ln>
         </p:spPr>
-      </p:sp>
-      <p:pic>
-        <p:nvPicPr>
-          <p:cNvPr id="13" name="Image 3" descr="C:/Users/neuma_p1qrsic/Repo/agentic-ops1/.scratch/deckgen/logos/evonik.png">    </p:cNvPr>
-          <p:cNvPicPr>
-            <a:picLocks noChangeAspect="1"/>
-          </p:cNvPicPr>
-          <p:nvPr/>
-        </p:nvPicPr>
-        <p:blipFill>
-          <a:blip r:embed="rId4"/>
-          <a:stretch>
-            <a:fillRect/>
-          </a:stretch>
-        </p:blipFill>
-        <p:spPr>
-          <a:xfrm>
-            <a:off x="2444191" y="4919751"/>
-            <a:ext cx="1274674" cy="328627"/>
-          </a:xfrm>
-          <a:prstGeom prst="rect">
-            <a:avLst/>
-          </a:prstGeom>
-        </p:spPr>
-      </p:pic>
-      <p:sp>
-        <p:nvSpPr>
-          <p:cNvPr id="14" name="Text 8"/>
-          <p:cNvSpPr/>
-          <p:nvPr/>
-        </p:nvSpPr>
-        <p:spPr>
-          <a:xfrm>
-            <a:off x="4178808" y="4754880"/>
-            <a:ext cx="7445959" cy="658368"/>
-          </a:xfrm>
-          <a:prstGeom prst="rect">
-            <a:avLst/>
-          </a:prstGeom>
-          <a:noFill/>
-          <a:ln/>
-        </p:spPr>
-        <p:txBody>
-          <a:bodyPr wrap="square" rtlCol="0" anchor="ctr"/>
-          <a:lstStyle/>
-          <a:p>
-            <a:pPr indent="0" marL="0">
-              <a:lnSpc>
-                <a:spcPct val="112000"/>
-              </a:lnSpc>
-              <a:buNone/>
-            </a:pPr>
-            <a:r>
-              <a:rPr lang="en-US" sz="1300" dirty="0">
-                <a:solidFill>
-                  <a:srgbClr val="AAB6C7"/>
-                </a:solidFill>
-                <a:latin typeface="Segoe UI" pitchFamily="34" charset="0"/>
-                <a:ea typeface="Segoe UI" pitchFamily="34" charset="-122"/>
-                <a:cs typeface="Segoe UI" pitchFamily="34" charset="-120"/>
-              </a:rPr>
-              <a:t>An SAP co-innovation partner. The cockpit runs on SAP's own cloud, so it sits inside your landscape.</a:t>
-            </a:r>
-            <a:endParaRPr lang="en-US" sz="1300" dirty="0"/>
-          </a:p>
-        </p:txBody>
-      </p:sp>
-      <p:sp>
-        <p:nvSpPr>
-          <p:cNvPr id="15" name="Text 9"/>
-          <p:cNvSpPr/>
-          <p:nvPr/>
-        </p:nvSpPr>
-        <p:spPr>
-          <a:xfrm>
-            <a:off x="566928" y="6400800"/>
-            <a:ext cx="8229600" cy="274320"/>
-          </a:xfrm>
-          <a:prstGeom prst="rect">
-            <a:avLst/>
-          </a:prstGeom>
-          <a:noFill/>
-          <a:ln/>
-        </p:spPr>
-        <p:txBody>
-          <a:bodyPr wrap="square" rtlCol="0" anchor="ctr"/>
-          <a:lstStyle/>
-          <a:p>
-            <a:pPr algn="l" indent="0" marL="0">
-              <a:buNone/>
-            </a:pPr>
-            <a:r>
-              <a:rPr lang="en-US" sz="900" b="1" dirty="0">
-                <a:solidFill>
-                  <a:srgbClr val="AAB6C7"/>
-                </a:solidFill>
-                <a:latin typeface="Segoe UI" pitchFamily="34" charset="0"/>
-                <a:ea typeface="Segoe UI" pitchFamily="34" charset="-122"/>
-                <a:cs typeface="Segoe UI" pitchFamily="34" charset="-120"/>
-              </a:rPr>
-              <a:t>Brisken</a:t>
-            </a:r>
-            <a:pPr algn="l" indent="0" marL="0">
-              <a:buNone/>
-            </a:pPr>
-            <a:r>
-              <a:rPr lang="en-US" sz="900" dirty="0">
-                <a:solidFill>
-                  <a:srgbClr val="7C8A9B"/>
-                </a:solidFill>
-                <a:latin typeface="Segoe UI" pitchFamily="34" charset="0"/>
-                <a:ea typeface="Segoe UI" pitchFamily="34" charset="-122"/>
-                <a:cs typeface="Segoe UI" pitchFamily="34" charset="-120"/>
-              </a:rPr>
-              <a:t>   TreasuryCentral, powered by OnePilot</a:t>
-            </a:r>
-            <a:endParaRPr lang="en-US" sz="900" dirty="0"/>
-          </a:p>
-        </p:txBody>
-      </p:sp>
-      <p:sp>
-        <p:nvSpPr>
-          <p:cNvPr id="16" name="Text 10"/>
-          <p:cNvSpPr/>
-          <p:nvPr/>
-        </p:nvSpPr>
-        <p:spPr>
-          <a:xfrm>
-            <a:off x="10527487" y="6400800"/>
-            <a:ext cx="1097280" cy="274320"/>
-          </a:xfrm>
-          <a:prstGeom prst="rect">
-            <a:avLst/>
-          </a:prstGeom>
-          <a:noFill/>
-          <a:ln/>
-        </p:spPr>
-        <p:txBody>
-          <a:bodyPr wrap="square" rtlCol="0" anchor="ctr"/>
-          <a:lstStyle/>
-          <a:p>
-            <a:pPr algn="r" indent="0" marL="0">
-              <a:buNone/>
-            </a:pPr>
-            <a:r>
-              <a:rPr lang="en-US" sz="900" dirty="0">
-                <a:solidFill>
-                  <a:srgbClr val="AAB6C7"/>
-                </a:solidFill>
-                <a:latin typeface="Segoe UI" pitchFamily="34" charset="0"/>
-                <a:ea typeface="Segoe UI" pitchFamily="34" charset="-122"/>
-                <a:cs typeface="Segoe UI" pitchFamily="34" charset="-120"/>
-              </a:rPr>
-              <a:t>08 / 10</a:t>
-            </a:r>
-            <a:endParaRPr lang="en-US" sz="900" dirty="0"/>
-          </a:p>
-        </p:txBody>
-      </p:sp>
-      <p:sp>
-        <p:nvSpPr>
-          <p:cNvPr id="17" name="Shape 11"/>
-          <p:cNvSpPr/>
-          <p:nvPr/>
-        </p:nvSpPr>
-        <p:spPr>
-          <a:xfrm>
-            <a:off x="566928" y="6327648"/>
-            <a:ext cx="11057839" cy="0"/>
-          </a:xfrm>
-          <a:prstGeom prst="line">
-            <a:avLst/>
-          </a:prstGeom>
-          <a:noFill/>
-          <a:ln w="9525">
-            <a:solidFill>
-              <a:srgbClr val="36414F"/>
-            </a:solidFill>
-            <a:prstDash val="solid"/>
-          </a:ln>
-        </p:spPr>
+        <p:txBody>
+          <a:bodyPr/>
+          <a:lstStyle/>
+          <a:p>
+            <a:endParaRPr lang="en-US"/>
+          </a:p>
+        </p:txBody>
       </p:sp>
     </p:spTree>
   </p:cSld>
@@ -8819,6 +9073,7 @@
         <a:solidFill>
           <a:srgbClr val="0B0E14"/>
         </a:solidFill>
+        <a:effectLst/>
       </p:bgPr>
     </p:bg>
     <p:spTree>
@@ -8837,14 +9092,14 @@
       </p:grpSpPr>
       <p:pic>
         <p:nvPicPr>
-          <p:cNvPr id="2" name="Image 0" descr="C:/Users/neuma_p1qrsic/Repo/agentic-ops1/.scratch/logo/favicon.png">    </p:cNvPr>
+          <p:cNvPr id="2" name="Image 0" descr="C:/Users/neuma_p1qrsic/Repo/agentic-ops1/.scratch/logo/favicon.png"/>
           <p:cNvPicPr>
             <a:picLocks noChangeAspect="1"/>
           </p:cNvPicPr>
           <p:nvPr/>
         </p:nvPicPr>
         <p:blipFill>
-          <a:blip r:embed="rId1"/>
+          <a:blip r:embed="rId3"/>
           <a:stretch>
             <a:fillRect/>
           </a:stretch>
@@ -8883,6 +9138,13 @@
             <a:prstDash val="solid"/>
           </a:ln>
         </p:spPr>
+        <p:txBody>
+          <a:bodyPr/>
+          <a:lstStyle/>
+          <a:p>
+            <a:endParaRPr lang="en-US"/>
+          </a:p>
+        </p:txBody>
       </p:sp>
       <p:sp>
         <p:nvSpPr>
@@ -8905,11 +9167,11 @@
           <a:bodyPr wrap="square" rtlCol="0" anchor="ctr"/>
           <a:lstStyle/>
           <a:p>
-            <a:pPr algn="l" indent="0" marL="0">
+            <a:pPr marL="0" indent="0" algn="l">
               <a:buNone/>
             </a:pPr>
             <a:r>
-              <a:rPr lang="en-US" sz="1200" b="1" spc="200" kern="0" dirty="0">
+              <a:rPr lang="en-US" sz="1200" b="1" kern="0" spc="200" dirty="0">
                 <a:solidFill>
                   <a:srgbClr val="3BE3E0"/>
                 </a:solidFill>
@@ -8944,7 +9206,7 @@
           <a:bodyPr wrap="square" rtlCol="0" anchor="ctr"/>
           <a:lstStyle/>
           <a:p>
-            <a:pPr indent="0" marL="0">
+            <a:pPr marL="0" indent="0">
               <a:buNone/>
             </a:pPr>
             <a:r>
@@ -8988,6 +9250,13 @@
             <a:prstDash val="solid"/>
           </a:ln>
         </p:spPr>
+        <p:txBody>
+          <a:bodyPr/>
+          <a:lstStyle/>
+          <a:p>
+            <a:endParaRPr lang="en-US"/>
+          </a:p>
+        </p:txBody>
       </p:sp>
       <p:sp>
         <p:nvSpPr>
@@ -9015,17 +9284,24 @@
             <a:prstDash val="solid"/>
           </a:ln>
         </p:spPr>
+        <p:txBody>
+          <a:bodyPr/>
+          <a:lstStyle/>
+          <a:p>
+            <a:endParaRPr lang="en-US"/>
+          </a:p>
+        </p:txBody>
       </p:sp>
       <p:pic>
         <p:nvPicPr>
-          <p:cNvPr id="8" name="Image 1" descr="C:/Users/neuma_p1qrsic/Repo/agentic-ops1/.scratch/icons/shield.png">    </p:cNvPr>
+          <p:cNvPr id="8" name="Image 1" descr="C:/Users/neuma_p1qrsic/Repo/agentic-ops1/.scratch/icons/shield.png"/>
           <p:cNvPicPr>
             <a:picLocks noChangeAspect="1"/>
           </p:cNvPicPr>
           <p:nvPr/>
         </p:nvPicPr>
         <p:blipFill>
-          <a:blip r:embed="rId2"/>
+          <a:blip r:embed="rId4"/>
           <a:stretch>
             <a:fillRect/>
           </a:stretch>
@@ -9061,7 +9337,7 @@
           <a:bodyPr wrap="square" rtlCol="0" anchor="ctr"/>
           <a:lstStyle/>
           <a:p>
-            <a:pPr indent="0" marL="0">
+            <a:pPr marL="0" indent="0">
               <a:buNone/>
             </a:pPr>
             <a:r>
@@ -9100,7 +9376,7 @@
           <a:bodyPr wrap="square" rtlCol="0" anchor="t"/>
           <a:lstStyle/>
           <a:p>
-            <a:pPr indent="0" marL="0">
+            <a:pPr marL="0" indent="0">
               <a:lnSpc>
                 <a:spcPct val="116000"/>
               </a:lnSpc>
@@ -9147,6 +9423,13 @@
             <a:prstDash val="solid"/>
           </a:ln>
         </p:spPr>
+        <p:txBody>
+          <a:bodyPr/>
+          <a:lstStyle/>
+          <a:p>
+            <a:endParaRPr lang="en-US"/>
+          </a:p>
+        </p:txBody>
       </p:sp>
       <p:sp>
         <p:nvSpPr>
@@ -9174,17 +9457,24 @@
             <a:prstDash val="solid"/>
           </a:ln>
         </p:spPr>
+        <p:txBody>
+          <a:bodyPr/>
+          <a:lstStyle/>
+          <a:p>
+            <a:endParaRPr lang="en-US"/>
+          </a:p>
+        </p:txBody>
       </p:sp>
       <p:pic>
         <p:nvPicPr>
-          <p:cNvPr id="13" name="Image 2" descr="C:/Users/neuma_p1qrsic/Repo/agentic-ops1/.scratch/icons/globe.png">    </p:cNvPr>
+          <p:cNvPr id="13" name="Image 2" descr="C:/Users/neuma_p1qrsic/Repo/agentic-ops1/.scratch/icons/globe.png"/>
           <p:cNvPicPr>
             <a:picLocks noChangeAspect="1"/>
           </p:cNvPicPr>
           <p:nvPr/>
         </p:nvPicPr>
         <p:blipFill>
-          <a:blip r:embed="rId3"/>
+          <a:blip r:embed="rId5"/>
           <a:stretch>
             <a:fillRect/>
           </a:stretch>
@@ -9220,7 +9510,7 @@
           <a:bodyPr wrap="square" rtlCol="0" anchor="ctr"/>
           <a:lstStyle/>
           <a:p>
-            <a:pPr indent="0" marL="0">
+            <a:pPr marL="0" indent="0">
               <a:buNone/>
             </a:pPr>
             <a:r>
@@ -9259,7 +9549,7 @@
           <a:bodyPr wrap="square" rtlCol="0" anchor="t"/>
           <a:lstStyle/>
           <a:p>
-            <a:pPr indent="0" marL="0">
+            <a:pPr marL="0" indent="0">
               <a:lnSpc>
                 <a:spcPct val="116000"/>
               </a:lnSpc>
@@ -9306,6 +9596,13 @@
             <a:prstDash val="solid"/>
           </a:ln>
         </p:spPr>
+        <p:txBody>
+          <a:bodyPr/>
+          <a:lstStyle/>
+          <a:p>
+            <a:endParaRPr lang="en-US"/>
+          </a:p>
+        </p:txBody>
       </p:sp>
       <p:sp>
         <p:nvSpPr>
@@ -9333,17 +9630,24 @@
             <a:prstDash val="solid"/>
           </a:ln>
         </p:spPr>
+        <p:txBody>
+          <a:bodyPr/>
+          <a:lstStyle/>
+          <a:p>
+            <a:endParaRPr lang="en-US"/>
+          </a:p>
+        </p:txBody>
       </p:sp>
       <p:pic>
         <p:nvPicPr>
-          <p:cNvPr id="18" name="Image 3" descr="C:/Users/neuma_p1qrsic/Repo/agentic-ops1/.scratch/icons/blocks.png">    </p:cNvPr>
+          <p:cNvPr id="18" name="Image 3" descr="C:/Users/neuma_p1qrsic/Repo/agentic-ops1/.scratch/icons/blocks.png"/>
           <p:cNvPicPr>
             <a:picLocks noChangeAspect="1"/>
           </p:cNvPicPr>
           <p:nvPr/>
         </p:nvPicPr>
         <p:blipFill>
-          <a:blip r:embed="rId4"/>
+          <a:blip r:embed="rId6"/>
           <a:stretch>
             <a:fillRect/>
           </a:stretch>
@@ -9379,7 +9683,7 @@
           <a:bodyPr wrap="square" rtlCol="0" anchor="ctr"/>
           <a:lstStyle/>
           <a:p>
-            <a:pPr indent="0" marL="0">
+            <a:pPr marL="0" indent="0">
               <a:buNone/>
             </a:pPr>
             <a:r>
@@ -9418,7 +9722,7 @@
           <a:bodyPr wrap="square" rtlCol="0" anchor="t"/>
           <a:lstStyle/>
           <a:p>
-            <a:pPr indent="0" marL="0">
+            <a:pPr marL="0" indent="0">
               <a:lnSpc>
                 <a:spcPct val="116000"/>
               </a:lnSpc>
@@ -9460,7 +9764,7 @@
           <a:bodyPr wrap="square" rtlCol="0" anchor="ctr"/>
           <a:lstStyle/>
           <a:p>
-            <a:pPr indent="0" marL="0">
+            <a:pPr marL="0" indent="0">
               <a:buNone/>
             </a:pPr>
             <a:r>
@@ -9499,7 +9803,7 @@
           <a:bodyPr wrap="square" rtlCol="0" anchor="ctr"/>
           <a:lstStyle/>
           <a:p>
-            <a:pPr indent="0" marL="0">
+            <a:pPr marL="0" indent="0">
               <a:buNone/>
             </a:pPr>
             <a:r>
@@ -9538,7 +9842,7 @@
           <a:bodyPr wrap="square" rtlCol="0" anchor="ctr"/>
           <a:lstStyle/>
           <a:p>
-            <a:pPr indent="0" marL="0">
+            <a:pPr marL="0" indent="0">
               <a:buNone/>
             </a:pPr>
             <a:r>
@@ -9577,7 +9881,7 @@
           <a:bodyPr wrap="square" rtlCol="0" anchor="ctr"/>
           <a:lstStyle/>
           <a:p>
-            <a:pPr indent="0" marL="0">
+            <a:pPr marL="0" indent="0">
               <a:buNone/>
             </a:pPr>
             <a:r>
@@ -9616,7 +9920,7 @@
           <a:bodyPr wrap="square" rtlCol="0" anchor="ctr"/>
           <a:lstStyle/>
           <a:p>
-            <a:pPr indent="0" marL="0">
+            <a:pPr marL="0" indent="0">
               <a:buNone/>
             </a:pPr>
             <a:r>
@@ -9655,7 +9959,7 @@
           <a:bodyPr wrap="square" rtlCol="0" anchor="ctr"/>
           <a:lstStyle/>
           <a:p>
-            <a:pPr indent="0" marL="0">
+            <a:pPr marL="0" indent="0">
               <a:buNone/>
             </a:pPr>
             <a:r>
@@ -9694,7 +9998,7 @@
           <a:bodyPr wrap="square" rtlCol="0" anchor="ctr"/>
           <a:lstStyle/>
           <a:p>
-            <a:pPr algn="l" indent="0" marL="0">
+            <a:pPr marL="0" indent="0" algn="l">
               <a:buNone/>
             </a:pPr>
             <a:r>
@@ -9708,9 +10012,6 @@
               </a:rPr>
               <a:t>Brisken</a:t>
             </a:r>
-            <a:pPr algn="l" indent="0" marL="0">
-              <a:buNone/>
-            </a:pPr>
             <a:r>
               <a:rPr lang="en-US" sz="900" dirty="0">
                 <a:solidFill>
@@ -9747,7 +10048,7 @@
           <a:bodyPr wrap="square" rtlCol="0" anchor="ctr"/>
           <a:lstStyle/>
           <a:p>
-            <a:pPr algn="r" indent="0" marL="0">
+            <a:pPr marL="0" indent="0" algn="r">
               <a:buNone/>
             </a:pPr>
             <a:r>
@@ -9787,6 +10088,13 @@
             <a:prstDash val="solid"/>
           </a:ln>
         </p:spPr>
+        <p:txBody>
+          <a:bodyPr/>
+          <a:lstStyle/>
+          <a:p>
+            <a:endParaRPr lang="en-US"/>
+          </a:p>
+        </p:txBody>
       </p:sp>
     </p:spTree>
   </p:cSld>
@@ -10089,4 +10397,665 @@
     </a:ext>
   </a:extLst>
 </a:theme>
+</file>
+
+<file path=ppt/theme/theme2.xml><?xml version="1.0" encoding="utf-8"?>
+<a:theme xmlns:a="http://schemas.openxmlformats.org/drawingml/2006/main" name="Office Theme">
+  <a:themeElements>
+    <a:clrScheme name="Office">
+      <a:dk1>
+        <a:sysClr val="windowText" lastClr="000000"/>
+      </a:dk1>
+      <a:lt1>
+        <a:sysClr val="window" lastClr="FFFFFF"/>
+      </a:lt1>
+      <a:dk2>
+        <a:srgbClr val="0E2841"/>
+      </a:dk2>
+      <a:lt2>
+        <a:srgbClr val="E8E8E8"/>
+      </a:lt2>
+      <a:accent1>
+        <a:srgbClr val="156082"/>
+      </a:accent1>
+      <a:accent2>
+        <a:srgbClr val="E97132"/>
+      </a:accent2>
+      <a:accent3>
+        <a:srgbClr val="196B24"/>
+      </a:accent3>
+      <a:accent4>
+        <a:srgbClr val="0F9ED5"/>
+      </a:accent4>
+      <a:accent5>
+        <a:srgbClr val="A02B93"/>
+      </a:accent5>
+      <a:accent6>
+        <a:srgbClr val="4EA72E"/>
+      </a:accent6>
+      <a:hlink>
+        <a:srgbClr val="467886"/>
+      </a:hlink>
+      <a:folHlink>
+        <a:srgbClr val="96607D"/>
+      </a:folHlink>
+    </a:clrScheme>
+    <a:fontScheme name="Office">
+      <a:majorFont>
+        <a:latin typeface="Aptos Display" panose="02110004020202020204"/>
+        <a:ea typeface=""/>
+        <a:cs typeface=""/>
+        <a:font script="Jpan" typeface="游ゴシック Light"/>
+        <a:font script="Hang" typeface="맑은 고딕"/>
+        <a:font script="Hans" typeface="等线 Light"/>
+        <a:font script="Hant" typeface="新細明體"/>
+        <a:font script="Arab" typeface="Times New Roman"/>
+        <a:font script="Hebr" typeface="Times New Roman"/>
+        <a:font script="Thai" typeface="Angsana New"/>
+        <a:font script="Ethi" typeface="Nyala"/>
+        <a:font script="Beng" typeface="Vrinda"/>
+        <a:font script="Gujr" typeface="Shruti"/>
+        <a:font script="Khmr" typeface="MoolBoran"/>
+        <a:font script="Knda" typeface="Tunga"/>
+        <a:font script="Guru" typeface="Raavi"/>
+        <a:font script="Cans" typeface="Euphemia"/>
+        <a:font script="Cher" typeface="Plantagenet Cherokee"/>
+        <a:font script="Yiii" typeface="Microsoft Yi Baiti"/>
+        <a:font script="Tibt" typeface="Microsoft Himalaya"/>
+        <a:font script="Thaa" typeface="MV Boli"/>
+        <a:font script="Deva" typeface="Mangal"/>
+        <a:font script="Telu" typeface="Gautami"/>
+        <a:font script="Taml" typeface="Latha"/>
+        <a:font script="Syrc" typeface="Estrangelo Edessa"/>
+        <a:font script="Orya" typeface="Kalinga"/>
+        <a:font script="Mlym" typeface="Kartika"/>
+        <a:font script="Laoo" typeface="DokChampa"/>
+        <a:font script="Sinh" typeface="Iskoola Pota"/>
+        <a:font script="Mong" typeface="Mongolian Baiti"/>
+        <a:font script="Viet" typeface="Times New Roman"/>
+        <a:font script="Uigh" typeface="Microsoft Uighur"/>
+        <a:font script="Geor" typeface="Sylfaen"/>
+        <a:font script="Armn" typeface="Arial"/>
+        <a:font script="Bugi" typeface="Leelawadee UI"/>
+        <a:font script="Bopo" typeface="Microsoft JhengHei"/>
+        <a:font script="Java" typeface="Javanese Text"/>
+        <a:font script="Lisu" typeface="Segoe UI"/>
+        <a:font script="Mymr" typeface="Myanmar Text"/>
+        <a:font script="Nkoo" typeface="Ebrima"/>
+        <a:font script="Olck" typeface="Nirmala UI"/>
+        <a:font script="Osma" typeface="Ebrima"/>
+        <a:font script="Phag" typeface="Phagspa"/>
+        <a:font script="Syrn" typeface="Estrangelo Edessa"/>
+        <a:font script="Syrj" typeface="Estrangelo Edessa"/>
+        <a:font script="Syre" typeface="Estrangelo Edessa"/>
+        <a:font script="Sora" typeface="Nirmala UI"/>
+        <a:font script="Tale" typeface="Microsoft Tai Le"/>
+        <a:font script="Talu" typeface="Microsoft New Tai Lue"/>
+        <a:font script="Tfng" typeface="Ebrima"/>
+      </a:majorFont>
+      <a:minorFont>
+        <a:latin typeface="Aptos" panose="02110004020202020204"/>
+        <a:ea typeface=""/>
+        <a:cs typeface=""/>
+        <a:font script="Jpan" typeface="游ゴシック"/>
+        <a:font script="Hang" typeface="맑은 고딕"/>
+        <a:font script="Hans" typeface="等线"/>
+        <a:font script="Hant" typeface="新細明體"/>
+        <a:font script="Arab" typeface="Arial"/>
+        <a:font script="Hebr" typeface="Arial"/>
+        <a:font script="Thai" typeface="Cordia New"/>
+        <a:font script="Ethi" typeface="Nyala"/>
+        <a:font script="Beng" typeface="Vrinda"/>
+        <a:font script="Gujr" typeface="Shruti"/>
+        <a:font script="Khmr" typeface="DaunPenh"/>
+        <a:font script="Knda" typeface="Tunga"/>
+        <a:font script="Guru" typeface="Raavi"/>
+        <a:font script="Cans" typeface="Euphemia"/>
+        <a:font script="Cher" typeface="Plantagenet Cherokee"/>
+        <a:font script="Yiii" typeface="Microsoft Yi Baiti"/>
+        <a:font script="Tibt" typeface="Microsoft Himalaya"/>
+        <a:font script="Thaa" typeface="MV Boli"/>
+        <a:font script="Deva" typeface="Mangal"/>
+        <a:font script="Telu" typeface="Gautami"/>
+        <a:font script="Taml" typeface="Latha"/>
+        <a:font script="Syrc" typeface="Estrangelo Edessa"/>
+        <a:font script="Orya" typeface="Kalinga"/>
+        <a:font script="Mlym" typeface="Kartika"/>
+        <a:font script="Laoo" typeface="DokChampa"/>
+        <a:font script="Sinh" typeface="Iskoola Pota"/>
+        <a:font script="Mong" typeface="Mongolian Baiti"/>
+        <a:font script="Viet" typeface="Arial"/>
+        <a:font script="Uigh" typeface="Microsoft Uighur"/>
+        <a:font script="Geor" typeface="Sylfaen"/>
+        <a:font script="Armn" typeface="Arial"/>
+        <a:font script="Bugi" typeface="Leelawadee UI"/>
+        <a:font script="Bopo" typeface="Microsoft JhengHei"/>
+        <a:font script="Java" typeface="Javanese Text"/>
+        <a:font script="Lisu" typeface="Segoe UI"/>
+        <a:font script="Mymr" typeface="Myanmar Text"/>
+        <a:font script="Nkoo" typeface="Ebrima"/>
+        <a:font script="Olck" typeface="Nirmala UI"/>
+        <a:font script="Osma" typeface="Ebrima"/>
+        <a:font script="Phag" typeface="Phagspa"/>
+        <a:font script="Syrn" typeface="Estrangelo Edessa"/>
+        <a:font script="Syrj" typeface="Estrangelo Edessa"/>
+        <a:font script="Syre" typeface="Estrangelo Edessa"/>
+        <a:font script="Sora" typeface="Nirmala UI"/>
+        <a:font script="Tale" typeface="Microsoft Tai Le"/>
+        <a:font script="Talu" typeface="Microsoft New Tai Lue"/>
+        <a:font script="Tfng" typeface="Ebrima"/>
+      </a:minorFont>
+    </a:fontScheme>
+    <a:fmtScheme name="Office">
+      <a:fillStyleLst>
+        <a:solidFill>
+          <a:schemeClr val="phClr"/>
+        </a:solidFill>
+        <a:gradFill rotWithShape="1">
+          <a:gsLst>
+            <a:gs pos="0">
+              <a:schemeClr val="phClr">
+                <a:lumMod val="110000"/>
+                <a:satMod val="105000"/>
+                <a:tint val="67000"/>
+              </a:schemeClr>
+            </a:gs>
+            <a:gs pos="50000">
+              <a:schemeClr val="phClr">
+                <a:lumMod val="105000"/>
+                <a:satMod val="103000"/>
+                <a:tint val="73000"/>
+              </a:schemeClr>
+            </a:gs>
+            <a:gs pos="100000">
+              <a:schemeClr val="phClr">
+                <a:lumMod val="105000"/>
+                <a:satMod val="109000"/>
+                <a:tint val="81000"/>
+              </a:schemeClr>
+            </a:gs>
+          </a:gsLst>
+          <a:lin ang="5400000" scaled="0"/>
+        </a:gradFill>
+        <a:gradFill rotWithShape="1">
+          <a:gsLst>
+            <a:gs pos="0">
+              <a:schemeClr val="phClr">
+                <a:satMod val="103000"/>
+                <a:lumMod val="102000"/>
+                <a:tint val="94000"/>
+              </a:schemeClr>
+            </a:gs>
+            <a:gs pos="50000">
+              <a:schemeClr val="phClr">
+                <a:satMod val="110000"/>
+                <a:lumMod val="100000"/>
+                <a:shade val="100000"/>
+              </a:schemeClr>
+            </a:gs>
+            <a:gs pos="100000">
+              <a:schemeClr val="phClr">
+                <a:lumMod val="99000"/>
+                <a:satMod val="120000"/>
+                <a:shade val="78000"/>
+              </a:schemeClr>
+            </a:gs>
+          </a:gsLst>
+          <a:lin ang="5400000" scaled="0"/>
+        </a:gradFill>
+      </a:fillStyleLst>
+      <a:lnStyleLst>
+        <a:ln w="12700" cap="flat" cmpd="sng" algn="ctr">
+          <a:solidFill>
+            <a:schemeClr val="phClr"/>
+          </a:solidFill>
+          <a:prstDash val="solid"/>
+          <a:miter lim="800000"/>
+        </a:ln>
+        <a:ln w="19050" cap="flat" cmpd="sng" algn="ctr">
+          <a:solidFill>
+            <a:schemeClr val="phClr"/>
+          </a:solidFill>
+          <a:prstDash val="solid"/>
+          <a:miter lim="800000"/>
+        </a:ln>
+        <a:ln w="25400" cap="flat" cmpd="sng" algn="ctr">
+          <a:solidFill>
+            <a:schemeClr val="phClr"/>
+          </a:solidFill>
+          <a:prstDash val="solid"/>
+          <a:miter lim="800000"/>
+        </a:ln>
+      </a:lnStyleLst>
+      <a:effectStyleLst>
+        <a:effectStyle>
+          <a:effectLst/>
+        </a:effectStyle>
+        <a:effectStyle>
+          <a:effectLst/>
+        </a:effectStyle>
+        <a:effectStyle>
+          <a:effectLst>
+            <a:outerShdw blurRad="57150" dist="19050" dir="5400000" algn="ctr" rotWithShape="0">
+              <a:srgbClr val="000000">
+                <a:alpha val="63000"/>
+              </a:srgbClr>
+            </a:outerShdw>
+          </a:effectLst>
+        </a:effectStyle>
+      </a:effectStyleLst>
+      <a:bgFillStyleLst>
+        <a:solidFill>
+          <a:schemeClr val="phClr"/>
+        </a:solidFill>
+        <a:solidFill>
+          <a:schemeClr val="phClr">
+            <a:tint val="95000"/>
+            <a:satMod val="170000"/>
+          </a:schemeClr>
+        </a:solidFill>
+        <a:gradFill rotWithShape="1">
+          <a:gsLst>
+            <a:gs pos="0">
+              <a:schemeClr val="phClr">
+                <a:tint val="93000"/>
+                <a:satMod val="150000"/>
+                <a:shade val="98000"/>
+                <a:lumMod val="102000"/>
+              </a:schemeClr>
+            </a:gs>
+            <a:gs pos="50000">
+              <a:schemeClr val="phClr">
+                <a:tint val="98000"/>
+                <a:satMod val="130000"/>
+                <a:shade val="90000"/>
+                <a:lumMod val="103000"/>
+              </a:schemeClr>
+            </a:gs>
+            <a:gs pos="100000">
+              <a:schemeClr val="phClr">
+                <a:shade val="63000"/>
+                <a:satMod val="120000"/>
+              </a:schemeClr>
+            </a:gs>
+          </a:gsLst>
+          <a:lin ang="5400000" scaled="0"/>
+        </a:gradFill>
+      </a:bgFillStyleLst>
+    </a:fmtScheme>
+  </a:themeElements>
+  <a:objectDefaults>
+    <a:lnDef>
+      <a:spPr/>
+      <a:bodyPr/>
+      <a:lstStyle/>
+      <a:style>
+        <a:lnRef idx="2">
+          <a:schemeClr val="accent1"/>
+        </a:lnRef>
+        <a:fillRef idx="0">
+          <a:schemeClr val="accent1"/>
+        </a:fillRef>
+        <a:effectRef idx="1">
+          <a:schemeClr val="accent1"/>
+        </a:effectRef>
+        <a:fontRef idx="minor">
+          <a:schemeClr val="tx1"/>
+        </a:fontRef>
+      </a:style>
+    </a:lnDef>
+  </a:objectDefaults>
+  <a:extraClrSchemeLst/>
+  <a:extLst>
+    <a:ext uri="{05A4C25C-085E-4340-85A3-A5531E510DB2}">
+      <thm15:themeFamily xmlns:thm15="http://schemas.microsoft.com/office/thememl/2012/main" name="Office Theme" id="{2E142A2C-CD16-42D6-873A-C26D2A0506FA}" vid="{1BDDFF52-6CD6-40A5-AB3C-68EB2F1E4D0A}"/>
+    </a:ext>
+  </a:extLst>
+</a:theme>
+</file>
+
+<file path=customXml/item1.xml><?xml version="1.0" encoding="utf-8"?>
+<ct:contentTypeSchema xmlns:ct="http://schemas.microsoft.com/office/2006/metadata/contentType" xmlns:ma="http://schemas.microsoft.com/office/2006/metadata/properties/metaAttributes" ct:_="" ma:_="" ma:contentTypeName="Document" ma:contentTypeID="0x0101002E36004C6954FC41BFA5A9934AAC0872" ma:contentTypeVersion="24" ma:contentTypeDescription="Create a new document." ma:contentTypeScope="" ma:versionID="1cf73f14b085dc989d6ca704a5f7b696">
+  <xsd:schema xmlns:xsd="http://www.w3.org/2001/XMLSchema" xmlns:xs="http://www.w3.org/2001/XMLSchema" xmlns:p="http://schemas.microsoft.com/office/2006/metadata/properties" xmlns:ns1="http://schemas.microsoft.com/sharepoint/v3" xmlns:ns2="f7c12939-211d-4aac-95d7-b8d38b675650" xmlns:ns3="e9089a15-9498-4149-a6f3-b4bc8e4d21ac" targetNamespace="http://schemas.microsoft.com/office/2006/metadata/properties" ma:root="true" ma:fieldsID="d257115e6736aa2126af141fdcd75720" ns1:_="" ns2:_="" ns3:_="">
+    <xsd:import namespace="http://schemas.microsoft.com/sharepoint/v3"/>
+    <xsd:import namespace="f7c12939-211d-4aac-95d7-b8d38b675650"/>
+    <xsd:import namespace="e9089a15-9498-4149-a6f3-b4bc8e4d21ac"/>
+    <xsd:element name="properties">
+      <xsd:complexType>
+        <xsd:sequence>
+          <xsd:element name="documentManagement">
+            <xsd:complexType>
+              <xsd:all>
+                <xsd:element ref="ns2:MediaServiceMetadata" minOccurs="0"/>
+                <xsd:element ref="ns2:MediaServiceFastMetadata" minOccurs="0"/>
+                <xsd:element ref="ns2:MediaServiceAutoKeyPoints" minOccurs="0"/>
+                <xsd:element ref="ns2:MediaServiceKeyPoints" minOccurs="0"/>
+                <xsd:element ref="ns2:MediaServiceAutoTags" minOccurs="0"/>
+                <xsd:element ref="ns2:MediaServiceOCR" minOccurs="0"/>
+                <xsd:element ref="ns2:MediaServiceGenerationTime" minOccurs="0"/>
+                <xsd:element ref="ns2:MediaServiceEventHashCode" minOccurs="0"/>
+                <xsd:element ref="ns2:MediaServiceDateTaken" minOccurs="0"/>
+                <xsd:element ref="ns3:SharedWithUsers" minOccurs="0"/>
+                <xsd:element ref="ns3:SharedWithDetails" minOccurs="0"/>
+                <xsd:element ref="ns2:MediaLengthInSeconds" minOccurs="0"/>
+                <xsd:element ref="ns2:MediaServiceLocation" minOccurs="0"/>
+                <xsd:element ref="ns3:TaxCatchAll" minOccurs="0"/>
+                <xsd:element ref="ns2:lcf76f155ced4ddcb4097134ff3c332f" minOccurs="0"/>
+                <xsd:element ref="ns1:_ip_UnifiedCompliancePolicyProperties" minOccurs="0"/>
+                <xsd:element ref="ns1:_ip_UnifiedCompliancePolicyUIAction" minOccurs="0"/>
+                <xsd:element ref="ns2:MediaServiceObjectDetectorVersions" minOccurs="0"/>
+                <xsd:element ref="ns2:MediaServiceSearchProperties" minOccurs="0"/>
+                <xsd:element ref="ns2:MediaServiceBillingMetadata" minOccurs="0"/>
+              </xsd:all>
+            </xsd:complexType>
+          </xsd:element>
+        </xsd:sequence>
+      </xsd:complexType>
+    </xsd:element>
+  </xsd:schema>
+  <xsd:schema xmlns:xsd="http://www.w3.org/2001/XMLSchema" xmlns:xs="http://www.w3.org/2001/XMLSchema" xmlns:dms="http://schemas.microsoft.com/office/2006/documentManagement/types" xmlns:pc="http://schemas.microsoft.com/office/infopath/2007/PartnerControls" targetNamespace="http://schemas.microsoft.com/sharepoint/v3" elementFormDefault="qualified">
+    <xsd:import namespace="http://schemas.microsoft.com/office/2006/documentManagement/types"/>
+    <xsd:import namespace="http://schemas.microsoft.com/office/infopath/2007/PartnerControls"/>
+    <xsd:element name="_ip_UnifiedCompliancePolicyProperties" ma:index="24" nillable="true" ma:displayName="Unified Compliance Policy Properties" ma:hidden="true" ma:internalName="_ip_UnifiedCompliancePolicyProperties">
+      <xsd:simpleType>
+        <xsd:restriction base="dms:Note"/>
+      </xsd:simpleType>
+    </xsd:element>
+    <xsd:element name="_ip_UnifiedCompliancePolicyUIAction" ma:index="25" nillable="true" ma:displayName="Unified Compliance Policy UI Action" ma:hidden="true" ma:internalName="_ip_UnifiedCompliancePolicyUIAction">
+      <xsd:simpleType>
+        <xsd:restriction base="dms:Text"/>
+      </xsd:simpleType>
+    </xsd:element>
+  </xsd:schema>
+  <xsd:schema xmlns:xsd="http://www.w3.org/2001/XMLSchema" xmlns:xs="http://www.w3.org/2001/XMLSchema" xmlns:dms="http://schemas.microsoft.com/office/2006/documentManagement/types" xmlns:pc="http://schemas.microsoft.com/office/infopath/2007/PartnerControls" targetNamespace="f7c12939-211d-4aac-95d7-b8d38b675650" elementFormDefault="qualified">
+    <xsd:import namespace="http://schemas.microsoft.com/office/2006/documentManagement/types"/>
+    <xsd:import namespace="http://schemas.microsoft.com/office/infopath/2007/PartnerControls"/>
+    <xsd:element name="MediaServiceMetadata" ma:index="8" nillable="true" ma:displayName="MediaServiceMetadata" ma:hidden="true" ma:internalName="MediaServiceMetadata" ma:readOnly="true">
+      <xsd:simpleType>
+        <xsd:restriction base="dms:Note"/>
+      </xsd:simpleType>
+    </xsd:element>
+    <xsd:element name="MediaServiceFastMetadata" ma:index="9" nillable="true" ma:displayName="MediaServiceFastMetadata" ma:hidden="true" ma:internalName="MediaServiceFastMetadata" ma:readOnly="true">
+      <xsd:simpleType>
+        <xsd:restriction base="dms:Note"/>
+      </xsd:simpleType>
+    </xsd:element>
+    <xsd:element name="MediaServiceAutoKeyPoints" ma:index="10" nillable="true" ma:displayName="MediaServiceAutoKeyPoints" ma:hidden="true" ma:internalName="MediaServiceAutoKeyPoints" ma:readOnly="true">
+      <xsd:simpleType>
+        <xsd:restriction base="dms:Note"/>
+      </xsd:simpleType>
+    </xsd:element>
+    <xsd:element name="MediaServiceKeyPoints" ma:index="11" nillable="true" ma:displayName="KeyPoints" ma:hidden="true" ma:internalName="MediaServiceKeyPoints" ma:readOnly="true">
+      <xsd:simpleType>
+        <xsd:restriction base="dms:Note"/>
+      </xsd:simpleType>
+    </xsd:element>
+    <xsd:element name="MediaServiceAutoTags" ma:index="12" nillable="true" ma:displayName="Tags" ma:hidden="true" ma:internalName="MediaServiceAutoTags" ma:readOnly="true">
+      <xsd:simpleType>
+        <xsd:restriction base="dms:Text"/>
+      </xsd:simpleType>
+    </xsd:element>
+    <xsd:element name="MediaServiceOCR" ma:index="13" nillable="true" ma:displayName="Extracted Text" ma:hidden="true" ma:internalName="MediaServiceOCR" ma:readOnly="true">
+      <xsd:simpleType>
+        <xsd:restriction base="dms:Note"/>
+      </xsd:simpleType>
+    </xsd:element>
+    <xsd:element name="MediaServiceGenerationTime" ma:index="14" nillable="true" ma:displayName="MediaServiceGenerationTime" ma:hidden="true" ma:internalName="MediaServiceGenerationTime" ma:readOnly="true">
+      <xsd:simpleType>
+        <xsd:restriction base="dms:Text"/>
+      </xsd:simpleType>
+    </xsd:element>
+    <xsd:element name="MediaServiceEventHashCode" ma:index="15" nillable="true" ma:displayName="MediaServiceEventHashCode" ma:hidden="true" ma:internalName="MediaServiceEventHashCode" ma:readOnly="true">
+      <xsd:simpleType>
+        <xsd:restriction base="dms:Text"/>
+      </xsd:simpleType>
+    </xsd:element>
+    <xsd:element name="MediaServiceDateTaken" ma:index="16" nillable="true" ma:displayName="MediaServiceDateTaken" ma:hidden="true" ma:internalName="MediaServiceDateTaken" ma:readOnly="true">
+      <xsd:simpleType>
+        <xsd:restriction base="dms:Text"/>
+      </xsd:simpleType>
+    </xsd:element>
+    <xsd:element name="MediaLengthInSeconds" ma:index="19" nillable="true" ma:displayName="Length (seconds)" ma:hidden="true" ma:internalName="MediaLengthInSeconds" ma:readOnly="true">
+      <xsd:simpleType>
+        <xsd:restriction base="dms:Unknown"/>
+      </xsd:simpleType>
+    </xsd:element>
+    <xsd:element name="MediaServiceLocation" ma:index="20" nillable="true" ma:displayName="Location" ma:hidden="true" ma:internalName="MediaServiceLocation" ma:readOnly="true">
+      <xsd:simpleType>
+        <xsd:restriction base="dms:Text"/>
+      </xsd:simpleType>
+    </xsd:element>
+    <xsd:element name="lcf76f155ced4ddcb4097134ff3c332f" ma:index="23" nillable="true" ma:taxonomy="true" ma:internalName="lcf76f155ced4ddcb4097134ff3c332f" ma:taxonomyFieldName="MediaServiceImageTags" ma:displayName="Image Tags" ma:readOnly="false" ma:fieldId="{5cf76f15-5ced-4ddc-b409-7134ff3c332f}" ma:taxonomyMulti="true" ma:sspId="0fd6ee07-b435-4fc4-a9c7-316946df4b76" ma:termSetId="09814cd3-568e-fe90-9814-8d621ff8fb84" ma:anchorId="fba54fb3-c3e1-fe81-a776-ca4b69148c4d" ma:open="true" ma:isKeyword="false">
+      <xsd:complexType>
+        <xsd:sequence>
+          <xsd:element ref="pc:Terms" minOccurs="0" maxOccurs="1"/>
+        </xsd:sequence>
+      </xsd:complexType>
+    </xsd:element>
+    <xsd:element name="MediaServiceObjectDetectorVersions" ma:index="26" nillable="true" ma:displayName="MediaServiceObjectDetectorVersions" ma:hidden="true" ma:indexed="true" ma:internalName="MediaServiceObjectDetectorVersions" ma:readOnly="true">
+      <xsd:simpleType>
+        <xsd:restriction base="dms:Text"/>
+      </xsd:simpleType>
+    </xsd:element>
+    <xsd:element name="MediaServiceSearchProperties" ma:index="27" nillable="true" ma:displayName="MediaServiceSearchProperties" ma:hidden="true" ma:internalName="MediaServiceSearchProperties" ma:readOnly="true">
+      <xsd:simpleType>
+        <xsd:restriction base="dms:Note"/>
+      </xsd:simpleType>
+    </xsd:element>
+    <xsd:element name="MediaServiceBillingMetadata" ma:index="28" nillable="true" ma:displayName="MediaServiceBillingMetadata" ma:hidden="true" ma:internalName="MediaServiceBillingMetadata" ma:readOnly="true">
+      <xsd:simpleType>
+        <xsd:restriction base="dms:Note"/>
+      </xsd:simpleType>
+    </xsd:element>
+  </xsd:schema>
+  <xsd:schema xmlns:xsd="http://www.w3.org/2001/XMLSchema" xmlns:xs="http://www.w3.org/2001/XMLSchema" xmlns:dms="http://schemas.microsoft.com/office/2006/documentManagement/types" xmlns:pc="http://schemas.microsoft.com/office/infopath/2007/PartnerControls" targetNamespace="e9089a15-9498-4149-a6f3-b4bc8e4d21ac" elementFormDefault="qualified">
+    <xsd:import namespace="http://schemas.microsoft.com/office/2006/documentManagement/types"/>
+    <xsd:import namespace="http://schemas.microsoft.com/office/infopath/2007/PartnerControls"/>
+    <xsd:element name="SharedWithUsers" ma:index="17" nillable="true" ma:displayName="Shared With" ma:hidden="true" ma:internalName="SharedWithUsers" ma:readOnly="true">
+      <xsd:complexType>
+        <xsd:complexContent>
+          <xsd:extension base="dms:UserMulti">
+            <xsd:sequence>
+              <xsd:element name="UserInfo" minOccurs="0" maxOccurs="unbounded">
+                <xsd:complexType>
+                  <xsd:sequence>
+                    <xsd:element name="DisplayName" type="xsd:string" minOccurs="0"/>
+                    <xsd:element name="AccountId" type="dms:UserId" minOccurs="0" nillable="true"/>
+                    <xsd:element name="AccountType" type="xsd:string" minOccurs="0"/>
+                  </xsd:sequence>
+                </xsd:complexType>
+              </xsd:element>
+            </xsd:sequence>
+          </xsd:extension>
+        </xsd:complexContent>
+      </xsd:complexType>
+    </xsd:element>
+    <xsd:element name="SharedWithDetails" ma:index="18" nillable="true" ma:displayName="Shared With Details" ma:hidden="true" ma:internalName="SharedWithDetails" ma:readOnly="true">
+      <xsd:simpleType>
+        <xsd:restriction base="dms:Note"/>
+      </xsd:simpleType>
+    </xsd:element>
+    <xsd:element name="TaxCatchAll" ma:index="21" nillable="true" ma:displayName="Taxonomy Catch All Column" ma:hidden="true" ma:list="{3ed79911-b83d-417d-9b12-a1fdc4449e3b}" ma:internalName="TaxCatchAll" ma:showField="CatchAllData" ma:web="e9089a15-9498-4149-a6f3-b4bc8e4d21ac">
+      <xsd:complexType>
+        <xsd:complexContent>
+          <xsd:extension base="dms:MultiChoiceLookup">
+            <xsd:sequence>
+              <xsd:element name="Value" type="dms:Lookup" maxOccurs="unbounded" minOccurs="0" nillable="true"/>
+            </xsd:sequence>
+          </xsd:extension>
+        </xsd:complexContent>
+      </xsd:complexType>
+    </xsd:element>
+  </xsd:schema>
+  <xsd:schema xmlns="http://schemas.openxmlformats.org/package/2006/metadata/core-properties" xmlns:xsd="http://www.w3.org/2001/XMLSchema" xmlns:xsi="http://www.w3.org/2001/XMLSchema-instance" xmlns:dc="http://purl.org/dc/elements/1.1/" xmlns:dcterms="http://purl.org/dc/terms/" xmlns:odoc="http://schemas.microsoft.com/internal/obd" targetNamespace="http://schemas.openxmlformats.org/package/2006/metadata/core-properties" elementFormDefault="qualified" attributeFormDefault="unqualified" blockDefault="#all">
+    <xsd:import namespace="http://purl.org/dc/elements/1.1/" schemaLocation="http://dublincore.org/schemas/xmls/qdc/2003/04/02/dc.xsd"/>
+    <xsd:import namespace="http://purl.org/dc/terms/" schemaLocation="http://dublincore.org/schemas/xmls/qdc/2003/04/02/dcterms.xsd"/>
+    <xsd:element name="coreProperties" type="CT_coreProperties"/>
+    <xsd:complexType name="CT_coreProperties">
+      <xsd:all>
+        <xsd:element ref="dc:creator" minOccurs="0" maxOccurs="1"/>
+        <xsd:element ref="dcterms:created" minOccurs="0" maxOccurs="1"/>
+        <xsd:element ref="dc:identifier" minOccurs="0" maxOccurs="1"/>
+        <xsd:element name="contentType" minOccurs="0" maxOccurs="1" type="xsd:string" ma:displayName="Content Type"/>
+        <xsd:element ref="dc:title" minOccurs="0" maxOccurs="1" ma:index="1" ma:displayName="Title"/>
+        <xsd:element ref="dc:subject" minOccurs="0" maxOccurs="1"/>
+        <xsd:element ref="dc:description" minOccurs="0" maxOccurs="1"/>
+        <xsd:element name="keywords" minOccurs="0" maxOccurs="1" type="xsd:string"/>
+        <xsd:element ref="dc:language" minOccurs="0" maxOccurs="1"/>
+        <xsd:element name="category" minOccurs="0" maxOccurs="1" type="xsd:string"/>
+        <xsd:element name="version" minOccurs="0" maxOccurs="1" type="xsd:string"/>
+        <xsd:element name="revision" minOccurs="0" maxOccurs="1" type="xsd:string">
+          <xsd:annotation>
+            <xsd:documentation>
+                        This value indicates the number of saves or revisions. The application is responsible for updating this value after each revision.
+                    </xsd:documentation>
+          </xsd:annotation>
+        </xsd:element>
+        <xsd:element name="lastModifiedBy" minOccurs="0" maxOccurs="1" type="xsd:string"/>
+        <xsd:element ref="dcterms:modified" minOccurs="0" maxOccurs="1"/>
+        <xsd:element name="contentStatus" minOccurs="0" maxOccurs="1" type="xsd:string"/>
+      </xsd:all>
+    </xsd:complexType>
+  </xsd:schema>
+  <xs:schema xmlns:pc="http://schemas.microsoft.com/office/infopath/2007/PartnerControls" xmlns:xs="http://www.w3.org/2001/XMLSchema" targetNamespace="http://schemas.microsoft.com/office/infopath/2007/PartnerControls" elementFormDefault="qualified" attributeFormDefault="unqualified">
+    <xs:element name="Person">
+      <xs:complexType>
+        <xs:sequence>
+          <xs:element ref="pc:DisplayName" minOccurs="0"/>
+          <xs:element ref="pc:AccountId" minOccurs="0"/>
+          <xs:element ref="pc:AccountType" minOccurs="0"/>
+        </xs:sequence>
+      </xs:complexType>
+    </xs:element>
+    <xs:element name="DisplayName" type="xs:string"/>
+    <xs:element name="AccountId" type="xs:string"/>
+    <xs:element name="AccountType" type="xs:string"/>
+    <xs:element name="BDCAssociatedEntity">
+      <xs:complexType>
+        <xs:sequence>
+          <xs:element ref="pc:BDCEntity" minOccurs="0" maxOccurs="unbounded"/>
+        </xs:sequence>
+        <xs:attribute ref="pc:EntityNamespace"/>
+        <xs:attribute ref="pc:EntityName"/>
+        <xs:attribute ref="pc:SystemInstanceName"/>
+        <xs:attribute ref="pc:AssociationName"/>
+      </xs:complexType>
+    </xs:element>
+    <xs:attribute name="EntityNamespace" type="xs:string"/>
+    <xs:attribute name="EntityName" type="xs:string"/>
+    <xs:attribute name="SystemInstanceName" type="xs:string"/>
+    <xs:attribute name="AssociationName" type="xs:string"/>
+    <xs:element name="BDCEntity">
+      <xs:complexType>
+        <xs:sequence>
+          <xs:element ref="pc:EntityDisplayName" minOccurs="0"/>
+          <xs:element ref="pc:EntityInstanceReference" minOccurs="0"/>
+          <xs:element ref="pc:EntityId1" minOccurs="0"/>
+          <xs:element ref="pc:EntityId2" minOccurs="0"/>
+          <xs:element ref="pc:EntityId3" minOccurs="0"/>
+          <xs:element ref="pc:EntityId4" minOccurs="0"/>
+          <xs:element ref="pc:EntityId5" minOccurs="0"/>
+        </xs:sequence>
+      </xs:complexType>
+    </xs:element>
+    <xs:element name="EntityDisplayName" type="xs:string"/>
+    <xs:element name="EntityInstanceReference" type="xs:string"/>
+    <xs:element name="EntityId1" type="xs:string"/>
+    <xs:element name="EntityId2" type="xs:string"/>
+    <xs:element name="EntityId3" type="xs:string"/>
+    <xs:element name="EntityId4" type="xs:string"/>
+    <xs:element name="EntityId5" type="xs:string"/>
+    <xs:element name="Terms">
+      <xs:complexType>
+        <xs:sequence>
+          <xs:element ref="pc:TermInfo" minOccurs="0" maxOccurs="unbounded"/>
+        </xs:sequence>
+      </xs:complexType>
+    </xs:element>
+    <xs:element name="TermInfo">
+      <xs:complexType>
+        <xs:sequence>
+          <xs:element ref="pc:TermName" minOccurs="0"/>
+          <xs:element ref="pc:TermId" minOccurs="0"/>
+        </xs:sequence>
+      </xs:complexType>
+    </xs:element>
+    <xs:element name="TermName" type="xs:string"/>
+    <xs:element name="TermId" type="xs:string"/>
+  </xs:schema>
+</ct:contentTypeSchema>
+</file>
+
+<file path=customXml/item2.xml><?xml version="1.0" encoding="utf-8"?>
+<p:properties xmlns:p="http://schemas.microsoft.com/office/2006/metadata/properties" xmlns:xsi="http://www.w3.org/2001/XMLSchema-instance" xmlns:pc="http://schemas.microsoft.com/office/infopath/2007/PartnerControls">
+  <documentManagement>
+    <_ip_UnifiedCompliancePolicyUIAction xmlns="http://schemas.microsoft.com/sharepoint/v3" xsi:nil="true"/>
+    <lcf76f155ced4ddcb4097134ff3c332f xmlns="f7c12939-211d-4aac-95d7-b8d38b675650">
+      <Terms xmlns="http://schemas.microsoft.com/office/infopath/2007/PartnerControls"/>
+    </lcf76f155ced4ddcb4097134ff3c332f>
+    <_ip_UnifiedCompliancePolicyProperties xmlns="http://schemas.microsoft.com/sharepoint/v3" xsi:nil="true"/>
+    <TaxCatchAll xmlns="e9089a15-9498-4149-a6f3-b4bc8e4d21ac" xsi:nil="true"/>
+  </documentManagement>
+</p:properties>
+</file>
+
+<file path=customXml/item3.xml><?xml version="1.0" encoding="utf-8"?>
+<?mso-contentType ?>
+<FormTemplates xmlns="http://schemas.microsoft.com/sharepoint/v3/contenttype/forms">
+  <Display>DocumentLibraryForm</Display>
+  <Edit>DocumentLibraryForm</Edit>
+  <New>DocumentLibraryForm</New>
+</FormTemplates>
+</file>
+
+<file path=customXml/itemProps1.xml><?xml version="1.0" encoding="utf-8"?>
+<ds:datastoreItem xmlns:ds="http://schemas.openxmlformats.org/officeDocument/2006/customXml" ds:itemID="{522A3996-0AB6-4E5C-BFF1-8E23DEA3E95C}">
+  <ds:schemaRefs>
+    <ds:schemaRef ds:uri="http://schemas.microsoft.com/office/2006/metadata/contentType"/>
+    <ds:schemaRef ds:uri="http://schemas.microsoft.com/office/2006/metadata/properties/metaAttributes"/>
+    <ds:schemaRef ds:uri="http://www.w3.org/2001/XMLSchema"/>
+    <ds:schemaRef ds:uri="http://schemas.microsoft.com/office/2006/metadata/properties"/>
+    <ds:schemaRef ds:uri="http://schemas.microsoft.com/sharepoint/v3"/>
+    <ds:schemaRef ds:uri="f7c12939-211d-4aac-95d7-b8d38b675650"/>
+    <ds:schemaRef ds:uri="e9089a15-9498-4149-a6f3-b4bc8e4d21ac"/>
+    <ds:schemaRef ds:uri="http://schemas.microsoft.com/office/2006/documentManagement/types"/>
+    <ds:schemaRef ds:uri="http://schemas.microsoft.com/office/infopath/2007/PartnerControls"/>
+    <ds:schemaRef ds:uri="http://schemas.openxmlformats.org/package/2006/metadata/core-properties"/>
+    <ds:schemaRef ds:uri="http://purl.org/dc/elements/1.1/"/>
+    <ds:schemaRef ds:uri="http://purl.org/dc/terms/"/>
+    <ds:schemaRef ds:uri="http://schemas.microsoft.com/internal/obd"/>
+  </ds:schemaRefs>
+</ds:datastoreItem>
+</file>
+
+<file path=customXml/itemProps2.xml><?xml version="1.0" encoding="utf-8"?>
+<ds:datastoreItem xmlns:ds="http://schemas.openxmlformats.org/officeDocument/2006/customXml" ds:itemID="{9E10413B-EFB3-40B3-982F-9A2BD4937EC1}">
+  <ds:schemaRefs>
+    <ds:schemaRef ds:uri="http://schemas.microsoft.com/office/2006/documentManagement/types"/>
+    <ds:schemaRef ds:uri="http://www.w3.org/XML/1998/namespace"/>
+    <ds:schemaRef ds:uri="e9089a15-9498-4149-a6f3-b4bc8e4d21ac"/>
+    <ds:schemaRef ds:uri="http://schemas.microsoft.com/office/infopath/2007/PartnerControls"/>
+    <ds:schemaRef ds:uri="http://schemas.openxmlformats.org/package/2006/metadata/core-properties"/>
+    <ds:schemaRef ds:uri="http://purl.org/dc/elements/1.1/"/>
+    <ds:schemaRef ds:uri="http://schemas.microsoft.com/office/2006/metadata/properties"/>
+    <ds:schemaRef ds:uri="f7c12939-211d-4aac-95d7-b8d38b675650"/>
+    <ds:schemaRef ds:uri="http://schemas.microsoft.com/sharepoint/v3"/>
+    <ds:schemaRef ds:uri="http://purl.org/dc/dcmitype/"/>
+    <ds:schemaRef ds:uri="http://purl.org/dc/terms/"/>
+  </ds:schemaRefs>
+</ds:datastoreItem>
+</file>
+
+<file path=customXml/itemProps3.xml><?xml version="1.0" encoding="utf-8"?>
+<ds:datastoreItem xmlns:ds="http://schemas.openxmlformats.org/officeDocument/2006/customXml" ds:itemID="{EB1BF405-05F5-4FE4-9DD0-32EE219EF453}">
+  <ds:schemaRefs>
+    <ds:schemaRef ds:uri="http://schemas.microsoft.com/sharepoint/v3/contenttype/forms"/>
+  </ds:schemaRefs>
+</ds:datastoreItem>
+</file>
+
+<file path=docMetadata/LabelInfo.xml><?xml version="1.0" encoding="utf-8"?>
+<clbl:labelList xmlns:clbl="http://schemas.microsoft.com/office/2020/mipLabelMetadata">
+  <clbl:label id="{c5f3e595-28df-4b6d-866e-5db0c24f0139}" enabled="1" method="Standard" siteId="{aa3bd2bf-9c6e-4f49-9c4f-44f878ae9e74}" removed="0"/>
+</clbl:labelList>
 </file>